--- a/docs/pptx/entire/ritu-entire-linsubhr-sens-sideeffect.pptx
+++ b/docs/pptx/entire/ritu-entire-linsubhr-sens-sideeffect.pptx
@@ -3045,612 +3045,612 @@
           </p:nvSpPr>
           <p:spPr>
             <a:xfrm>
-              <a:off x="1172049" y="3387494"/>
-              <a:ext cx="7090630" cy="1940457"/>
+              <a:off x="1172049" y="3370503"/>
+              <a:ext cx="7090630" cy="1959827"/>
             </a:xfrm>
             <a:custGeom>
               <a:avLst/>
               <a:pathLst>
-                <a:path w="7090630" h="1940457">
+                <a:path w="7090630" h="1959827">
                   <a:moveTo>
                     <a:pt x="0" y="0"/>
                   </a:moveTo>
                   <a:lnTo>
-                    <a:pt x="71622" y="48699"/>
-                  </a:lnTo>
-                  <a:lnTo>
-                    <a:pt x="143245" y="96306"/>
-                  </a:lnTo>
-                  <a:lnTo>
-                    <a:pt x="214867" y="142844"/>
-                  </a:lnTo>
-                  <a:lnTo>
-                    <a:pt x="286490" y="188337"/>
-                  </a:lnTo>
-                  <a:lnTo>
-                    <a:pt x="358112" y="232810"/>
-                  </a:lnTo>
-                  <a:lnTo>
-                    <a:pt x="429735" y="276284"/>
-                  </a:lnTo>
-                  <a:lnTo>
-                    <a:pt x="501357" y="318782"/>
-                  </a:lnTo>
-                  <a:lnTo>
-                    <a:pt x="572980" y="360327"/>
-                  </a:lnTo>
-                  <a:lnTo>
-                    <a:pt x="644602" y="400939"/>
-                  </a:lnTo>
-                  <a:lnTo>
-                    <a:pt x="716225" y="440640"/>
-                  </a:lnTo>
-                  <a:lnTo>
-                    <a:pt x="787847" y="479449"/>
-                  </a:lnTo>
-                  <a:lnTo>
-                    <a:pt x="859470" y="517388"/>
-                  </a:lnTo>
-                  <a:lnTo>
-                    <a:pt x="931092" y="554475"/>
-                  </a:lnTo>
-                  <a:lnTo>
-                    <a:pt x="1002715" y="590729"/>
-                  </a:lnTo>
-                  <a:lnTo>
-                    <a:pt x="1074337" y="626170"/>
-                  </a:lnTo>
-                  <a:lnTo>
-                    <a:pt x="1145960" y="660816"/>
-                  </a:lnTo>
-                  <a:lnTo>
-                    <a:pt x="1217582" y="694683"/>
-                  </a:lnTo>
-                  <a:lnTo>
-                    <a:pt x="1289205" y="727791"/>
-                  </a:lnTo>
-                  <a:lnTo>
-                    <a:pt x="1360827" y="760156"/>
-                  </a:lnTo>
-                  <a:lnTo>
-                    <a:pt x="1432450" y="791794"/>
-                  </a:lnTo>
-                  <a:lnTo>
-                    <a:pt x="1504073" y="822722"/>
-                  </a:lnTo>
-                  <a:lnTo>
-                    <a:pt x="1575695" y="852956"/>
-                  </a:lnTo>
-                  <a:lnTo>
-                    <a:pt x="1647318" y="882511"/>
-                  </a:lnTo>
-                  <a:lnTo>
-                    <a:pt x="1718940" y="911403"/>
-                  </a:lnTo>
-                  <a:lnTo>
-                    <a:pt x="1790563" y="939646"/>
-                  </a:lnTo>
-                  <a:lnTo>
-                    <a:pt x="1862185" y="967256"/>
-                  </a:lnTo>
-                  <a:lnTo>
-                    <a:pt x="1933808" y="994245"/>
-                  </a:lnTo>
-                  <a:lnTo>
-                    <a:pt x="2005430" y="1020629"/>
-                  </a:lnTo>
-                  <a:lnTo>
-                    <a:pt x="2077053" y="1046421"/>
-                  </a:lnTo>
-                  <a:lnTo>
-                    <a:pt x="2148675" y="1071634"/>
-                  </a:lnTo>
-                  <a:lnTo>
-                    <a:pt x="2220298" y="1096281"/>
-                  </a:lnTo>
-                  <a:lnTo>
-                    <a:pt x="2291920" y="1120375"/>
-                  </a:lnTo>
-                  <a:lnTo>
-                    <a:pt x="2363543" y="1143928"/>
-                  </a:lnTo>
-                  <a:lnTo>
-                    <a:pt x="2435165" y="1166953"/>
-                  </a:lnTo>
-                  <a:lnTo>
-                    <a:pt x="2506788" y="1189460"/>
-                  </a:lnTo>
-                  <a:lnTo>
-                    <a:pt x="2578410" y="1211463"/>
-                  </a:lnTo>
-                  <a:lnTo>
-                    <a:pt x="2650033" y="1232971"/>
-                  </a:lnTo>
-                  <a:lnTo>
-                    <a:pt x="2721655" y="1253997"/>
-                  </a:lnTo>
-                  <a:lnTo>
-                    <a:pt x="2793278" y="1274551"/>
-                  </a:lnTo>
-                  <a:lnTo>
-                    <a:pt x="2864901" y="1294644"/>
-                  </a:lnTo>
-                  <a:lnTo>
-                    <a:pt x="2936523" y="1314285"/>
-                  </a:lnTo>
-                  <a:lnTo>
-                    <a:pt x="3008146" y="1333486"/>
-                  </a:lnTo>
-                  <a:lnTo>
-                    <a:pt x="3079768" y="1343475"/>
-                  </a:lnTo>
-                  <a:lnTo>
-                    <a:pt x="3151391" y="1348425"/>
-                  </a:lnTo>
-                  <a:lnTo>
-                    <a:pt x="3223013" y="1353346"/>
-                  </a:lnTo>
-                  <a:lnTo>
-                    <a:pt x="3294636" y="1358237"/>
-                  </a:lnTo>
-                  <a:lnTo>
-                    <a:pt x="3366258" y="1363098"/>
-                  </a:lnTo>
-                  <a:lnTo>
-                    <a:pt x="3437881" y="1367931"/>
-                  </a:lnTo>
-                  <a:lnTo>
-                    <a:pt x="3509503" y="1372734"/>
-                  </a:lnTo>
-                  <a:lnTo>
-                    <a:pt x="3581126" y="1377509"/>
-                  </a:lnTo>
-                  <a:lnTo>
-                    <a:pt x="3652748" y="1382255"/>
-                  </a:lnTo>
-                  <a:lnTo>
-                    <a:pt x="3724371" y="1386973"/>
-                  </a:lnTo>
-                  <a:lnTo>
-                    <a:pt x="3795993" y="1391663"/>
-                  </a:lnTo>
-                  <a:lnTo>
-                    <a:pt x="3867616" y="1396324"/>
-                  </a:lnTo>
-                  <a:lnTo>
-                    <a:pt x="3939238" y="1400957"/>
-                  </a:lnTo>
-                  <a:lnTo>
-                    <a:pt x="4010861" y="1405563"/>
-                  </a:lnTo>
-                  <a:lnTo>
-                    <a:pt x="4082483" y="1410141"/>
-                  </a:lnTo>
-                  <a:lnTo>
-                    <a:pt x="4154106" y="1414692"/>
-                  </a:lnTo>
-                  <a:lnTo>
-                    <a:pt x="4225729" y="1419215"/>
-                  </a:lnTo>
-                  <a:lnTo>
-                    <a:pt x="4297351" y="1423712"/>
-                  </a:lnTo>
-                  <a:lnTo>
-                    <a:pt x="4368974" y="1428181"/>
-                  </a:lnTo>
-                  <a:lnTo>
-                    <a:pt x="4440596" y="1432624"/>
-                  </a:lnTo>
-                  <a:lnTo>
-                    <a:pt x="4512219" y="1437040"/>
-                  </a:lnTo>
-                  <a:lnTo>
-                    <a:pt x="4583841" y="1441429"/>
-                  </a:lnTo>
-                  <a:lnTo>
-                    <a:pt x="4655464" y="1445792"/>
-                  </a:lnTo>
-                  <a:lnTo>
-                    <a:pt x="4727086" y="1450129"/>
-                  </a:lnTo>
-                  <a:lnTo>
-                    <a:pt x="4798709" y="1454441"/>
-                  </a:lnTo>
-                  <a:lnTo>
-                    <a:pt x="4870331" y="1458726"/>
-                  </a:lnTo>
-                  <a:lnTo>
-                    <a:pt x="4941954" y="1462985"/>
-                  </a:lnTo>
-                  <a:lnTo>
-                    <a:pt x="5013576" y="1467220"/>
-                  </a:lnTo>
-                  <a:lnTo>
-                    <a:pt x="5085199" y="1471428"/>
-                  </a:lnTo>
-                  <a:lnTo>
-                    <a:pt x="5156821" y="1475612"/>
-                  </a:lnTo>
-                  <a:lnTo>
-                    <a:pt x="5228444" y="1479770"/>
-                  </a:lnTo>
-                  <a:lnTo>
-                    <a:pt x="5300066" y="1483904"/>
-                  </a:lnTo>
-                  <a:lnTo>
-                    <a:pt x="5371689" y="1488013"/>
-                  </a:lnTo>
-                  <a:lnTo>
-                    <a:pt x="5443311" y="1492097"/>
-                  </a:lnTo>
-                  <a:lnTo>
-                    <a:pt x="5514934" y="1496156"/>
-                  </a:lnTo>
-                  <a:lnTo>
-                    <a:pt x="5586557" y="1500192"/>
-                  </a:lnTo>
-                  <a:lnTo>
-                    <a:pt x="5658179" y="1504203"/>
-                  </a:lnTo>
-                  <a:lnTo>
-                    <a:pt x="5729802" y="1508190"/>
-                  </a:lnTo>
-                  <a:lnTo>
-                    <a:pt x="5801424" y="1512153"/>
-                  </a:lnTo>
-                  <a:lnTo>
-                    <a:pt x="5873047" y="1516093"/>
-                  </a:lnTo>
-                  <a:lnTo>
-                    <a:pt x="5944669" y="1520009"/>
-                  </a:lnTo>
-                  <a:lnTo>
-                    <a:pt x="6016292" y="1523901"/>
-                  </a:lnTo>
-                  <a:lnTo>
-                    <a:pt x="6087914" y="1527771"/>
-                  </a:lnTo>
-                  <a:lnTo>
-                    <a:pt x="6159537" y="1531617"/>
-                  </a:lnTo>
-                  <a:lnTo>
-                    <a:pt x="6231159" y="1535439"/>
-                  </a:lnTo>
-                  <a:lnTo>
-                    <a:pt x="6302782" y="1539240"/>
-                  </a:lnTo>
-                  <a:lnTo>
-                    <a:pt x="6374404" y="1543017"/>
-                  </a:lnTo>
-                  <a:lnTo>
-                    <a:pt x="6446027" y="1546771"/>
-                  </a:lnTo>
-                  <a:lnTo>
-                    <a:pt x="6517649" y="1550504"/>
-                  </a:lnTo>
-                  <a:lnTo>
-                    <a:pt x="6589272" y="1554213"/>
-                  </a:lnTo>
-                  <a:lnTo>
-                    <a:pt x="6660894" y="1557901"/>
-                  </a:lnTo>
-                  <a:lnTo>
-                    <a:pt x="6732517" y="1561566"/>
-                  </a:lnTo>
-                  <a:lnTo>
-                    <a:pt x="6804139" y="1565210"/>
-                  </a:lnTo>
-                  <a:lnTo>
-                    <a:pt x="6875762" y="1568832"/>
-                  </a:lnTo>
-                  <a:lnTo>
-                    <a:pt x="6947385" y="1572432"/>
-                  </a:lnTo>
-                  <a:lnTo>
-                    <a:pt x="7019007" y="1576010"/>
-                  </a:lnTo>
-                  <a:lnTo>
-                    <a:pt x="7090630" y="1579567"/>
-                  </a:lnTo>
-                  <a:lnTo>
-                    <a:pt x="7090630" y="1940457"/>
-                  </a:lnTo>
-                  <a:lnTo>
-                    <a:pt x="7019007" y="1935192"/>
-                  </a:lnTo>
-                  <a:lnTo>
-                    <a:pt x="6947385" y="1929807"/>
-                  </a:lnTo>
-                  <a:lnTo>
-                    <a:pt x="6875762" y="1924297"/>
-                  </a:lnTo>
-                  <a:lnTo>
-                    <a:pt x="6804139" y="1918662"/>
-                  </a:lnTo>
-                  <a:lnTo>
-                    <a:pt x="6732517" y="1912896"/>
-                  </a:lnTo>
-                  <a:lnTo>
-                    <a:pt x="6660894" y="1906999"/>
-                  </a:lnTo>
-                  <a:lnTo>
-                    <a:pt x="6589272" y="1900966"/>
-                  </a:lnTo>
-                  <a:lnTo>
-                    <a:pt x="6517649" y="1894795"/>
-                  </a:lnTo>
-                  <a:lnTo>
-                    <a:pt x="6446027" y="1888482"/>
-                  </a:lnTo>
-                  <a:lnTo>
-                    <a:pt x="6374404" y="1882023"/>
-                  </a:lnTo>
-                  <a:lnTo>
-                    <a:pt x="6302782" y="1875417"/>
-                  </a:lnTo>
-                  <a:lnTo>
-                    <a:pt x="6231159" y="1868659"/>
-                  </a:lnTo>
-                  <a:lnTo>
-                    <a:pt x="6159537" y="1861746"/>
-                  </a:lnTo>
-                  <a:lnTo>
-                    <a:pt x="6087914" y="1854674"/>
-                  </a:lnTo>
-                  <a:lnTo>
-                    <a:pt x="6016292" y="1847440"/>
-                  </a:lnTo>
-                  <a:lnTo>
-                    <a:pt x="5944669" y="1840039"/>
-                  </a:lnTo>
-                  <a:lnTo>
-                    <a:pt x="5873047" y="1832469"/>
-                  </a:lnTo>
-                  <a:lnTo>
-                    <a:pt x="5801424" y="1824725"/>
-                  </a:lnTo>
-                  <a:lnTo>
-                    <a:pt x="5729802" y="1816803"/>
-                  </a:lnTo>
-                  <a:lnTo>
-                    <a:pt x="5658179" y="1808699"/>
-                  </a:lnTo>
-                  <a:lnTo>
-                    <a:pt x="5586557" y="1800409"/>
-                  </a:lnTo>
-                  <a:lnTo>
-                    <a:pt x="5514934" y="1791929"/>
-                  </a:lnTo>
-                  <a:lnTo>
-                    <a:pt x="5443311" y="1783254"/>
-                  </a:lnTo>
-                  <a:lnTo>
-                    <a:pt x="5371689" y="1774380"/>
-                  </a:lnTo>
-                  <a:lnTo>
-                    <a:pt x="5300066" y="1765302"/>
-                  </a:lnTo>
-                  <a:lnTo>
-                    <a:pt x="5228444" y="1756016"/>
-                  </a:lnTo>
-                  <a:lnTo>
-                    <a:pt x="5156821" y="1746517"/>
-                  </a:lnTo>
-                  <a:lnTo>
-                    <a:pt x="5085199" y="1736799"/>
-                  </a:lnTo>
-                  <a:lnTo>
-                    <a:pt x="5013576" y="1726858"/>
-                  </a:lnTo>
-                  <a:lnTo>
-                    <a:pt x="4941954" y="1716689"/>
-                  </a:lnTo>
-                  <a:lnTo>
-                    <a:pt x="4870331" y="1706287"/>
-                  </a:lnTo>
-                  <a:lnTo>
-                    <a:pt x="4798709" y="1695646"/>
-                  </a:lnTo>
-                  <a:lnTo>
-                    <a:pt x="4727086" y="1684760"/>
-                  </a:lnTo>
-                  <a:lnTo>
-                    <a:pt x="4655464" y="1673624"/>
-                  </a:lnTo>
-                  <a:lnTo>
-                    <a:pt x="4583841" y="1662233"/>
-                  </a:lnTo>
-                  <a:lnTo>
-                    <a:pt x="4512219" y="1650580"/>
-                  </a:lnTo>
-                  <a:lnTo>
-                    <a:pt x="4440596" y="1638660"/>
-                  </a:lnTo>
-                  <a:lnTo>
-                    <a:pt x="4368974" y="1626466"/>
-                  </a:lnTo>
-                  <a:lnTo>
-                    <a:pt x="4297351" y="1613992"/>
-                  </a:lnTo>
-                  <a:lnTo>
-                    <a:pt x="4225729" y="1601232"/>
-                  </a:lnTo>
-                  <a:lnTo>
-                    <a:pt x="4154106" y="1588179"/>
-                  </a:lnTo>
-                  <a:lnTo>
-                    <a:pt x="4082483" y="1574826"/>
-                  </a:lnTo>
-                  <a:lnTo>
-                    <a:pt x="4010861" y="1561166"/>
-                  </a:lnTo>
-                  <a:lnTo>
-                    <a:pt x="3939238" y="1547193"/>
-                  </a:lnTo>
-                  <a:lnTo>
-                    <a:pt x="3867616" y="1532899"/>
-                  </a:lnTo>
-                  <a:lnTo>
-                    <a:pt x="3795993" y="1518276"/>
-                  </a:lnTo>
-                  <a:lnTo>
-                    <a:pt x="3724371" y="1503318"/>
-                  </a:lnTo>
-                  <a:lnTo>
-                    <a:pt x="3652748" y="1488017"/>
-                  </a:lnTo>
-                  <a:lnTo>
-                    <a:pt x="3581126" y="1472364"/>
-                  </a:lnTo>
-                  <a:lnTo>
-                    <a:pt x="3509503" y="1456352"/>
-                  </a:lnTo>
-                  <a:lnTo>
-                    <a:pt x="3437881" y="1439972"/>
-                  </a:lnTo>
-                  <a:lnTo>
-                    <a:pt x="3366258" y="1423216"/>
-                  </a:lnTo>
-                  <a:lnTo>
-                    <a:pt x="3294636" y="1406076"/>
-                  </a:lnTo>
-                  <a:lnTo>
-                    <a:pt x="3223013" y="1388541"/>
-                  </a:lnTo>
-                  <a:lnTo>
-                    <a:pt x="3151391" y="1370605"/>
-                  </a:lnTo>
-                  <a:lnTo>
-                    <a:pt x="3079768" y="1352256"/>
-                  </a:lnTo>
-                  <a:lnTo>
-                    <a:pt x="3008146" y="1338496"/>
-                  </a:lnTo>
-                  <a:lnTo>
-                    <a:pt x="2936523" y="1333486"/>
-                  </a:lnTo>
-                  <a:lnTo>
-                    <a:pt x="2864901" y="1328446"/>
-                  </a:lnTo>
-                  <a:lnTo>
-                    <a:pt x="2793278" y="1323375"/>
-                  </a:lnTo>
-                  <a:lnTo>
-                    <a:pt x="2721655" y="1318274"/>
-                  </a:lnTo>
-                  <a:lnTo>
-                    <a:pt x="2650033" y="1313142"/>
-                  </a:lnTo>
-                  <a:lnTo>
-                    <a:pt x="2578410" y="1307980"/>
-                  </a:lnTo>
-                  <a:lnTo>
-                    <a:pt x="2506788" y="1302786"/>
-                  </a:lnTo>
-                  <a:lnTo>
-                    <a:pt x="2435165" y="1297561"/>
-                  </a:lnTo>
-                  <a:lnTo>
-                    <a:pt x="2363543" y="1292304"/>
-                  </a:lnTo>
-                  <a:lnTo>
-                    <a:pt x="2291920" y="1287016"/>
-                  </a:lnTo>
-                  <a:lnTo>
-                    <a:pt x="2220298" y="1281696"/>
-                  </a:lnTo>
-                  <a:lnTo>
-                    <a:pt x="2148675" y="1276343"/>
-                  </a:lnTo>
-                  <a:lnTo>
-                    <a:pt x="2077053" y="1270959"/>
-                  </a:lnTo>
-                  <a:lnTo>
-                    <a:pt x="2005430" y="1265542"/>
-                  </a:lnTo>
-                  <a:lnTo>
-                    <a:pt x="1933808" y="1260092"/>
-                  </a:lnTo>
-                  <a:lnTo>
-                    <a:pt x="1862185" y="1254610"/>
-                  </a:lnTo>
-                  <a:lnTo>
-                    <a:pt x="1790563" y="1249094"/>
-                  </a:lnTo>
-                  <a:lnTo>
-                    <a:pt x="1718940" y="1243546"/>
-                  </a:lnTo>
-                  <a:lnTo>
-                    <a:pt x="1647318" y="1237964"/>
-                  </a:lnTo>
-                  <a:lnTo>
-                    <a:pt x="1575695" y="1232348"/>
-                  </a:lnTo>
-                  <a:lnTo>
-                    <a:pt x="1504073" y="1226698"/>
-                  </a:lnTo>
-                  <a:lnTo>
-                    <a:pt x="1432450" y="1221015"/>
-                  </a:lnTo>
-                  <a:lnTo>
-                    <a:pt x="1360827" y="1215297"/>
-                  </a:lnTo>
-                  <a:lnTo>
-                    <a:pt x="1289205" y="1209544"/>
-                  </a:lnTo>
-                  <a:lnTo>
-                    <a:pt x="1217582" y="1203757"/>
-                  </a:lnTo>
-                  <a:lnTo>
-                    <a:pt x="1145960" y="1197935"/>
-                  </a:lnTo>
-                  <a:lnTo>
-                    <a:pt x="1074337" y="1192078"/>
-                  </a:lnTo>
-                  <a:lnTo>
-                    <a:pt x="1002715" y="1186186"/>
-                  </a:lnTo>
-                  <a:lnTo>
-                    <a:pt x="931092" y="1180258"/>
-                  </a:lnTo>
-                  <a:lnTo>
-                    <a:pt x="859470" y="1174294"/>
-                  </a:lnTo>
-                  <a:lnTo>
-                    <a:pt x="787847" y="1168295"/>
-                  </a:lnTo>
-                  <a:lnTo>
-                    <a:pt x="716225" y="1162259"/>
-                  </a:lnTo>
-                  <a:lnTo>
-                    <a:pt x="644602" y="1156187"/>
-                  </a:lnTo>
-                  <a:lnTo>
-                    <a:pt x="572980" y="1150078"/>
-                  </a:lnTo>
-                  <a:lnTo>
-                    <a:pt x="501357" y="1143933"/>
-                  </a:lnTo>
-                  <a:lnTo>
-                    <a:pt x="429735" y="1137750"/>
-                  </a:lnTo>
-                  <a:lnTo>
-                    <a:pt x="358112" y="1131531"/>
-                  </a:lnTo>
-                  <a:lnTo>
-                    <a:pt x="286490" y="1125273"/>
-                  </a:lnTo>
-                  <a:lnTo>
-                    <a:pt x="214867" y="1118979"/>
-                  </a:lnTo>
-                  <a:lnTo>
-                    <a:pt x="143245" y="1112646"/>
-                  </a:lnTo>
-                  <a:lnTo>
-                    <a:pt x="71622" y="1106275"/>
-                  </a:lnTo>
-                  <a:lnTo>
-                    <a:pt x="0" y="1099865"/>
+                    <a:pt x="71622" y="49474"/>
+                  </a:lnTo>
+                  <a:lnTo>
+                    <a:pt x="143245" y="97829"/>
+                  </a:lnTo>
+                  <a:lnTo>
+                    <a:pt x="214867" y="145091"/>
+                  </a:lnTo>
+                  <a:lnTo>
+                    <a:pt x="286490" y="191283"/>
+                  </a:lnTo>
+                  <a:lnTo>
+                    <a:pt x="358112" y="236429"/>
+                  </a:lnTo>
+                  <a:lnTo>
+                    <a:pt x="429735" y="280555"/>
+                  </a:lnTo>
+                  <a:lnTo>
+                    <a:pt x="501357" y="323682"/>
+                  </a:lnTo>
+                  <a:lnTo>
+                    <a:pt x="572980" y="365833"/>
+                  </a:lnTo>
+                  <a:lnTo>
+                    <a:pt x="644602" y="407031"/>
+                  </a:lnTo>
+                  <a:lnTo>
+                    <a:pt x="716225" y="447297"/>
+                  </a:lnTo>
+                  <a:lnTo>
+                    <a:pt x="787847" y="486651"/>
+                  </a:lnTo>
+                  <a:lnTo>
+                    <a:pt x="859470" y="525116"/>
+                  </a:lnTo>
+                  <a:lnTo>
+                    <a:pt x="931092" y="562710"/>
+                  </a:lnTo>
+                  <a:lnTo>
+                    <a:pt x="1002715" y="599453"/>
+                  </a:lnTo>
+                  <a:lnTo>
+                    <a:pt x="1074337" y="635365"/>
+                  </a:lnTo>
+                  <a:lnTo>
+                    <a:pt x="1145960" y="670465"/>
+                  </a:lnTo>
+                  <a:lnTo>
+                    <a:pt x="1217582" y="704770"/>
+                  </a:lnTo>
+                  <a:lnTo>
+                    <a:pt x="1289205" y="738300"/>
+                  </a:lnTo>
+                  <a:lnTo>
+                    <a:pt x="1360827" y="771070"/>
+                  </a:lnTo>
+                  <a:lnTo>
+                    <a:pt x="1432450" y="803100"/>
+                  </a:lnTo>
+                  <a:lnTo>
+                    <a:pt x="1504073" y="834404"/>
+                  </a:lnTo>
+                  <a:lnTo>
+                    <a:pt x="1575695" y="865001"/>
+                  </a:lnTo>
+                  <a:lnTo>
+                    <a:pt x="1647318" y="894905"/>
+                  </a:lnTo>
+                  <a:lnTo>
+                    <a:pt x="1718940" y="924132"/>
+                  </a:lnTo>
+                  <a:lnTo>
+                    <a:pt x="1790563" y="952699"/>
+                  </a:lnTo>
+                  <a:lnTo>
+                    <a:pt x="1862185" y="980619"/>
+                  </a:lnTo>
+                  <a:lnTo>
+                    <a:pt x="1933808" y="1007907"/>
+                  </a:lnTo>
+                  <a:lnTo>
+                    <a:pt x="2005430" y="1034578"/>
+                  </a:lnTo>
+                  <a:lnTo>
+                    <a:pt x="2077053" y="1060646"/>
+                  </a:lnTo>
+                  <a:lnTo>
+                    <a:pt x="2148675" y="1086123"/>
+                  </a:lnTo>
+                  <a:lnTo>
+                    <a:pt x="2220298" y="1111025"/>
+                  </a:lnTo>
+                  <a:lnTo>
+                    <a:pt x="2291920" y="1135363"/>
+                  </a:lnTo>
+                  <a:lnTo>
+                    <a:pt x="2363543" y="1159150"/>
+                  </a:lnTo>
+                  <a:lnTo>
+                    <a:pt x="2435165" y="1182399"/>
+                  </a:lnTo>
+                  <a:lnTo>
+                    <a:pt x="2506788" y="1205122"/>
+                  </a:lnTo>
+                  <a:lnTo>
+                    <a:pt x="2578410" y="1227331"/>
+                  </a:lnTo>
+                  <a:lnTo>
+                    <a:pt x="2650033" y="1249038"/>
+                  </a:lnTo>
+                  <a:lnTo>
+                    <a:pt x="2721655" y="1270253"/>
+                  </a:lnTo>
+                  <a:lnTo>
+                    <a:pt x="2793278" y="1290989"/>
+                  </a:lnTo>
+                  <a:lnTo>
+                    <a:pt x="2864901" y="1311255"/>
+                  </a:lnTo>
+                  <a:lnTo>
+                    <a:pt x="2936523" y="1331063"/>
+                  </a:lnTo>
+                  <a:lnTo>
+                    <a:pt x="3008146" y="1350422"/>
+                  </a:lnTo>
+                  <a:lnTo>
+                    <a:pt x="3079768" y="1360638"/>
+                  </a:lnTo>
+                  <a:lnTo>
+                    <a:pt x="3151391" y="1365853"/>
+                  </a:lnTo>
+                  <a:lnTo>
+                    <a:pt x="3223013" y="1371035"/>
+                  </a:lnTo>
+                  <a:lnTo>
+                    <a:pt x="3294636" y="1376184"/>
+                  </a:lnTo>
+                  <a:lnTo>
+                    <a:pt x="3366258" y="1381301"/>
+                  </a:lnTo>
+                  <a:lnTo>
+                    <a:pt x="3437881" y="1386385"/>
+                  </a:lnTo>
+                  <a:lnTo>
+                    <a:pt x="3509503" y="1391438"/>
+                  </a:lnTo>
+                  <a:lnTo>
+                    <a:pt x="3581126" y="1396458"/>
+                  </a:lnTo>
+                  <a:lnTo>
+                    <a:pt x="3652748" y="1401447"/>
+                  </a:lnTo>
+                  <a:lnTo>
+                    <a:pt x="3724371" y="1406404"/>
+                  </a:lnTo>
+                  <a:lnTo>
+                    <a:pt x="3795993" y="1411330"/>
+                  </a:lnTo>
+                  <a:lnTo>
+                    <a:pt x="3867616" y="1416225"/>
+                  </a:lnTo>
+                  <a:lnTo>
+                    <a:pt x="3939238" y="1421089"/>
+                  </a:lnTo>
+                  <a:lnTo>
+                    <a:pt x="4010861" y="1425922"/>
+                  </a:lnTo>
+                  <a:lnTo>
+                    <a:pt x="4082483" y="1430725"/>
+                  </a:lnTo>
+                  <a:lnTo>
+                    <a:pt x="4154106" y="1435498"/>
+                  </a:lnTo>
+                  <a:lnTo>
+                    <a:pt x="4225729" y="1440240"/>
+                  </a:lnTo>
+                  <a:lnTo>
+                    <a:pt x="4297351" y="1444952"/>
+                  </a:lnTo>
+                  <a:lnTo>
+                    <a:pt x="4368974" y="1449635"/>
+                  </a:lnTo>
+                  <a:lnTo>
+                    <a:pt x="4440596" y="1454288"/>
+                  </a:lnTo>
+                  <a:lnTo>
+                    <a:pt x="4512219" y="1458912"/>
+                  </a:lnTo>
+                  <a:lnTo>
+                    <a:pt x="4583841" y="1463506"/>
+                  </a:lnTo>
+                  <a:lnTo>
+                    <a:pt x="4655464" y="1468072"/>
+                  </a:lnTo>
+                  <a:lnTo>
+                    <a:pt x="4727086" y="1472608"/>
+                  </a:lnTo>
+                  <a:lnTo>
+                    <a:pt x="4798709" y="1477116"/>
+                  </a:lnTo>
+                  <a:lnTo>
+                    <a:pt x="4870331" y="1481596"/>
+                  </a:lnTo>
+                  <a:lnTo>
+                    <a:pt x="4941954" y="1486047"/>
+                  </a:lnTo>
+                  <a:lnTo>
+                    <a:pt x="5013576" y="1490471"/>
+                  </a:lnTo>
+                  <a:lnTo>
+                    <a:pt x="5085199" y="1494866"/>
+                  </a:lnTo>
+                  <a:lnTo>
+                    <a:pt x="5156821" y="1499233"/>
+                  </a:lnTo>
+                  <a:lnTo>
+                    <a:pt x="5228444" y="1503573"/>
+                  </a:lnTo>
+                  <a:lnTo>
+                    <a:pt x="5300066" y="1507886"/>
+                  </a:lnTo>
+                  <a:lnTo>
+                    <a:pt x="5371689" y="1512171"/>
+                  </a:lnTo>
+                  <a:lnTo>
+                    <a:pt x="5443311" y="1516430"/>
+                  </a:lnTo>
+                  <a:lnTo>
+                    <a:pt x="5514934" y="1520661"/>
+                  </a:lnTo>
+                  <a:lnTo>
+                    <a:pt x="5586557" y="1524866"/>
+                  </a:lnTo>
+                  <a:lnTo>
+                    <a:pt x="5658179" y="1529044"/>
+                  </a:lnTo>
+                  <a:lnTo>
+                    <a:pt x="5729802" y="1533196"/>
+                  </a:lnTo>
+                  <a:lnTo>
+                    <a:pt x="5801424" y="1537321"/>
+                  </a:lnTo>
+                  <a:lnTo>
+                    <a:pt x="5873047" y="1541421"/>
+                  </a:lnTo>
+                  <a:lnTo>
+                    <a:pt x="5944669" y="1545495"/>
+                  </a:lnTo>
+                  <a:lnTo>
+                    <a:pt x="6016292" y="1549543"/>
+                  </a:lnTo>
+                  <a:lnTo>
+                    <a:pt x="6087914" y="1553565"/>
+                  </a:lnTo>
+                  <a:lnTo>
+                    <a:pt x="6159537" y="1557562"/>
+                  </a:lnTo>
+                  <a:lnTo>
+                    <a:pt x="6231159" y="1561534"/>
+                  </a:lnTo>
+                  <a:lnTo>
+                    <a:pt x="6302782" y="1565481"/>
+                  </a:lnTo>
+                  <a:lnTo>
+                    <a:pt x="6374404" y="1569402"/>
+                  </a:lnTo>
+                  <a:lnTo>
+                    <a:pt x="6446027" y="1573299"/>
+                  </a:lnTo>
+                  <a:lnTo>
+                    <a:pt x="6517649" y="1577172"/>
+                  </a:lnTo>
+                  <a:lnTo>
+                    <a:pt x="6589272" y="1581020"/>
+                  </a:lnTo>
+                  <a:lnTo>
+                    <a:pt x="6660894" y="1584844"/>
+                  </a:lnTo>
+                  <a:lnTo>
+                    <a:pt x="6732517" y="1588643"/>
+                  </a:lnTo>
+                  <a:lnTo>
+                    <a:pt x="6804139" y="1592419"/>
+                  </a:lnTo>
+                  <a:lnTo>
+                    <a:pt x="6875762" y="1596170"/>
+                  </a:lnTo>
+                  <a:lnTo>
+                    <a:pt x="6947385" y="1599898"/>
+                  </a:lnTo>
+                  <a:lnTo>
+                    <a:pt x="7019007" y="1603603"/>
+                  </a:lnTo>
+                  <a:lnTo>
+                    <a:pt x="7090630" y="1607284"/>
+                  </a:lnTo>
+                  <a:lnTo>
+                    <a:pt x="7090630" y="1959827"/>
+                  </a:lnTo>
+                  <a:lnTo>
+                    <a:pt x="7019007" y="1954575"/>
+                  </a:lnTo>
+                  <a:lnTo>
+                    <a:pt x="6947385" y="1949200"/>
+                  </a:lnTo>
+                  <a:lnTo>
+                    <a:pt x="6875762" y="1943701"/>
+                  </a:lnTo>
+                  <a:lnTo>
+                    <a:pt x="6804139" y="1938075"/>
+                  </a:lnTo>
+                  <a:lnTo>
+                    <a:pt x="6732517" y="1932319"/>
+                  </a:lnTo>
+                  <a:lnTo>
+                    <a:pt x="6660894" y="1926429"/>
+                  </a:lnTo>
+                  <a:lnTo>
+                    <a:pt x="6589272" y="1920403"/>
+                  </a:lnTo>
+                  <a:lnTo>
+                    <a:pt x="6517649" y="1914238"/>
+                  </a:lnTo>
+                  <a:lnTo>
+                    <a:pt x="6446027" y="1907930"/>
+                  </a:lnTo>
+                  <a:lnTo>
+                    <a:pt x="6374404" y="1901476"/>
+                  </a:lnTo>
+                  <a:lnTo>
+                    <a:pt x="6302782" y="1894872"/>
+                  </a:lnTo>
+                  <a:lnTo>
+                    <a:pt x="6231159" y="1888115"/>
+                  </a:lnTo>
+                  <a:lnTo>
+                    <a:pt x="6159537" y="1881203"/>
+                  </a:lnTo>
+                  <a:lnTo>
+                    <a:pt x="6087914" y="1874130"/>
+                  </a:lnTo>
+                  <a:lnTo>
+                    <a:pt x="6016292" y="1866893"/>
+                  </a:lnTo>
+                  <a:lnTo>
+                    <a:pt x="5944669" y="1859489"/>
+                  </a:lnTo>
+                  <a:lnTo>
+                    <a:pt x="5873047" y="1851914"/>
+                  </a:lnTo>
+                  <a:lnTo>
+                    <a:pt x="5801424" y="1844163"/>
+                  </a:lnTo>
+                  <a:lnTo>
+                    <a:pt x="5729802" y="1836232"/>
+                  </a:lnTo>
+                  <a:lnTo>
+                    <a:pt x="5658179" y="1828119"/>
+                  </a:lnTo>
+                  <a:lnTo>
+                    <a:pt x="5586557" y="1819817"/>
+                  </a:lnTo>
+                  <a:lnTo>
+                    <a:pt x="5514934" y="1811323"/>
+                  </a:lnTo>
+                  <a:lnTo>
+                    <a:pt x="5443311" y="1802632"/>
+                  </a:lnTo>
+                  <a:lnTo>
+                    <a:pt x="5371689" y="1793741"/>
+                  </a:lnTo>
+                  <a:lnTo>
+                    <a:pt x="5300066" y="1784643"/>
+                  </a:lnTo>
+                  <a:lnTo>
+                    <a:pt x="5228444" y="1775335"/>
+                  </a:lnTo>
+                  <a:lnTo>
+                    <a:pt x="5156821" y="1765812"/>
+                  </a:lnTo>
+                  <a:lnTo>
+                    <a:pt x="5085199" y="1756068"/>
+                  </a:lnTo>
+                  <a:lnTo>
+                    <a:pt x="5013576" y="1746098"/>
+                  </a:lnTo>
+                  <a:lnTo>
+                    <a:pt x="4941954" y="1735898"/>
+                  </a:lnTo>
+                  <a:lnTo>
+                    <a:pt x="4870331" y="1725461"/>
+                  </a:lnTo>
+                  <a:lnTo>
+                    <a:pt x="4798709" y="1714783"/>
+                  </a:lnTo>
+                  <a:lnTo>
+                    <a:pt x="4727086" y="1703858"/>
+                  </a:lnTo>
+                  <a:lnTo>
+                    <a:pt x="4655464" y="1692680"/>
+                  </a:lnTo>
+                  <a:lnTo>
+                    <a:pt x="4583841" y="1681243"/>
+                  </a:lnTo>
+                  <a:lnTo>
+                    <a:pt x="4512219" y="1669541"/>
+                  </a:lnTo>
+                  <a:lnTo>
+                    <a:pt x="4440596" y="1657569"/>
+                  </a:lnTo>
+                  <a:lnTo>
+                    <a:pt x="4368974" y="1645319"/>
+                  </a:lnTo>
+                  <a:lnTo>
+                    <a:pt x="4297351" y="1632786"/>
+                  </a:lnTo>
+                  <a:lnTo>
+                    <a:pt x="4225729" y="1619963"/>
+                  </a:lnTo>
+                  <a:lnTo>
+                    <a:pt x="4154106" y="1606843"/>
+                  </a:lnTo>
+                  <a:lnTo>
+                    <a:pt x="4082483" y="1593419"/>
+                  </a:lnTo>
+                  <a:lnTo>
+                    <a:pt x="4010861" y="1579684"/>
+                  </a:lnTo>
+                  <a:lnTo>
+                    <a:pt x="3939238" y="1565631"/>
+                  </a:lnTo>
+                  <a:lnTo>
+                    <a:pt x="3867616" y="1551254"/>
+                  </a:lnTo>
+                  <a:lnTo>
+                    <a:pt x="3795993" y="1536543"/>
+                  </a:lnTo>
+                  <a:lnTo>
+                    <a:pt x="3724371" y="1521492"/>
+                  </a:lnTo>
+                  <a:lnTo>
+                    <a:pt x="3652748" y="1506092"/>
+                  </a:lnTo>
+                  <a:lnTo>
+                    <a:pt x="3581126" y="1490336"/>
+                  </a:lnTo>
+                  <a:lnTo>
+                    <a:pt x="3509503" y="1474215"/>
+                  </a:lnTo>
+                  <a:lnTo>
+                    <a:pt x="3437881" y="1457721"/>
+                  </a:lnTo>
+                  <a:lnTo>
+                    <a:pt x="3366258" y="1440845"/>
+                  </a:lnTo>
+                  <a:lnTo>
+                    <a:pt x="3294636" y="1423579"/>
+                  </a:lnTo>
+                  <a:lnTo>
+                    <a:pt x="3223013" y="1405913"/>
+                  </a:lnTo>
+                  <a:lnTo>
+                    <a:pt x="3151391" y="1387837"/>
+                  </a:lnTo>
+                  <a:lnTo>
+                    <a:pt x="3079768" y="1369344"/>
+                  </a:lnTo>
+                  <a:lnTo>
+                    <a:pt x="3008146" y="1355390"/>
+                  </a:lnTo>
+                  <a:lnTo>
+                    <a:pt x="2936523" y="1350109"/>
+                  </a:lnTo>
+                  <a:lnTo>
+                    <a:pt x="2864901" y="1344794"/>
+                  </a:lnTo>
+                  <a:lnTo>
+                    <a:pt x="2793278" y="1339445"/>
+                  </a:lnTo>
+                  <a:lnTo>
+                    <a:pt x="2721655" y="1334063"/>
+                  </a:lnTo>
+                  <a:lnTo>
+                    <a:pt x="2650033" y="1328646"/>
+                  </a:lnTo>
+                  <a:lnTo>
+                    <a:pt x="2578410" y="1323194"/>
+                  </a:lnTo>
+                  <a:lnTo>
+                    <a:pt x="2506788" y="1317709"/>
+                  </a:lnTo>
+                  <a:lnTo>
+                    <a:pt x="2435165" y="1312188"/>
+                  </a:lnTo>
+                  <a:lnTo>
+                    <a:pt x="2363543" y="1306632"/>
+                  </a:lnTo>
+                  <a:lnTo>
+                    <a:pt x="2291920" y="1301041"/>
+                  </a:lnTo>
+                  <a:lnTo>
+                    <a:pt x="2220298" y="1295414"/>
+                  </a:lnTo>
+                  <a:lnTo>
+                    <a:pt x="2148675" y="1289752"/>
+                  </a:lnTo>
+                  <a:lnTo>
+                    <a:pt x="2077053" y="1284054"/>
+                  </a:lnTo>
+                  <a:lnTo>
+                    <a:pt x="2005430" y="1278319"/>
+                  </a:lnTo>
+                  <a:lnTo>
+                    <a:pt x="1933808" y="1272548"/>
+                  </a:lnTo>
+                  <a:lnTo>
+                    <a:pt x="1862185" y="1266741"/>
+                  </a:lnTo>
+                  <a:lnTo>
+                    <a:pt x="1790563" y="1260896"/>
+                  </a:lnTo>
+                  <a:lnTo>
+                    <a:pt x="1718940" y="1255014"/>
+                  </a:lnTo>
+                  <a:lnTo>
+                    <a:pt x="1647318" y="1249095"/>
+                  </a:lnTo>
+                  <a:lnTo>
+                    <a:pt x="1575695" y="1243139"/>
+                  </a:lnTo>
+                  <a:lnTo>
+                    <a:pt x="1504073" y="1237144"/>
+                  </a:lnTo>
+                  <a:lnTo>
+                    <a:pt x="1432450" y="1231112"/>
+                  </a:lnTo>
+                  <a:lnTo>
+                    <a:pt x="1360827" y="1225041"/>
+                  </a:lnTo>
+                  <a:lnTo>
+                    <a:pt x="1289205" y="1218932"/>
+                  </a:lnTo>
+                  <a:lnTo>
+                    <a:pt x="1217582" y="1212783"/>
+                  </a:lnTo>
+                  <a:lnTo>
+                    <a:pt x="1145960" y="1206596"/>
+                  </a:lnTo>
+                  <a:lnTo>
+                    <a:pt x="1074337" y="1200369"/>
+                  </a:lnTo>
+                  <a:lnTo>
+                    <a:pt x="1002715" y="1194103"/>
+                  </a:lnTo>
+                  <a:lnTo>
+                    <a:pt x="931092" y="1187797"/>
+                  </a:lnTo>
+                  <a:lnTo>
+                    <a:pt x="859470" y="1181451"/>
+                  </a:lnTo>
+                  <a:lnTo>
+                    <a:pt x="787847" y="1175065"/>
+                  </a:lnTo>
+                  <a:lnTo>
+                    <a:pt x="716225" y="1168638"/>
+                  </a:lnTo>
+                  <a:lnTo>
+                    <a:pt x="644602" y="1162170"/>
+                  </a:lnTo>
+                  <a:lnTo>
+                    <a:pt x="572980" y="1155662"/>
+                  </a:lnTo>
+                  <a:lnTo>
+                    <a:pt x="501357" y="1149111"/>
+                  </a:lnTo>
+                  <a:lnTo>
+                    <a:pt x="429735" y="1142520"/>
+                  </a:lnTo>
+                  <a:lnTo>
+                    <a:pt x="358112" y="1135886"/>
+                  </a:lnTo>
+                  <a:lnTo>
+                    <a:pt x="286490" y="1129210"/>
+                  </a:lnTo>
+                  <a:lnTo>
+                    <a:pt x="214867" y="1122492"/>
+                  </a:lnTo>
+                  <a:lnTo>
+                    <a:pt x="143245" y="1115731"/>
+                  </a:lnTo>
+                  <a:lnTo>
+                    <a:pt x="71622" y="1108927"/>
+                  </a:lnTo>
+                  <a:lnTo>
+                    <a:pt x="0" y="1102080"/>
                   </a:lnTo>
                   <a:close/>
                 </a:path>
@@ -3676,312 +3676,312 @@
           </p:nvSpPr>
           <p:spPr>
             <a:xfrm>
-              <a:off x="1172049" y="3387494"/>
-              <a:ext cx="7090630" cy="1579567"/>
+              <a:off x="1172049" y="3370503"/>
+              <a:ext cx="7090630" cy="1607284"/>
             </a:xfrm>
             <a:custGeom>
               <a:avLst/>
               <a:pathLst>
-                <a:path w="7090630" h="1579567">
+                <a:path w="7090630" h="1607284">
                   <a:moveTo>
                     <a:pt x="0" y="0"/>
                   </a:moveTo>
                   <a:lnTo>
-                    <a:pt x="71622" y="48699"/>
-                  </a:lnTo>
-                  <a:lnTo>
-                    <a:pt x="143245" y="96306"/>
-                  </a:lnTo>
-                  <a:lnTo>
-                    <a:pt x="214867" y="142844"/>
-                  </a:lnTo>
-                  <a:lnTo>
-                    <a:pt x="286490" y="188337"/>
-                  </a:lnTo>
-                  <a:lnTo>
-                    <a:pt x="358112" y="232810"/>
-                  </a:lnTo>
-                  <a:lnTo>
-                    <a:pt x="429735" y="276284"/>
-                  </a:lnTo>
-                  <a:lnTo>
-                    <a:pt x="501357" y="318782"/>
-                  </a:lnTo>
-                  <a:lnTo>
-                    <a:pt x="572980" y="360327"/>
-                  </a:lnTo>
-                  <a:lnTo>
-                    <a:pt x="644602" y="400939"/>
-                  </a:lnTo>
-                  <a:lnTo>
-                    <a:pt x="716225" y="440640"/>
-                  </a:lnTo>
-                  <a:lnTo>
-                    <a:pt x="787847" y="479449"/>
-                  </a:lnTo>
-                  <a:lnTo>
-                    <a:pt x="859470" y="517388"/>
-                  </a:lnTo>
-                  <a:lnTo>
-                    <a:pt x="931092" y="554475"/>
-                  </a:lnTo>
-                  <a:lnTo>
-                    <a:pt x="1002715" y="590729"/>
-                  </a:lnTo>
-                  <a:lnTo>
-                    <a:pt x="1074337" y="626170"/>
-                  </a:lnTo>
-                  <a:lnTo>
-                    <a:pt x="1145960" y="660816"/>
-                  </a:lnTo>
-                  <a:lnTo>
-                    <a:pt x="1217582" y="694683"/>
-                  </a:lnTo>
-                  <a:lnTo>
-                    <a:pt x="1289205" y="727791"/>
-                  </a:lnTo>
-                  <a:lnTo>
-                    <a:pt x="1360827" y="760156"/>
-                  </a:lnTo>
-                  <a:lnTo>
-                    <a:pt x="1432450" y="791794"/>
-                  </a:lnTo>
-                  <a:lnTo>
-                    <a:pt x="1504073" y="822722"/>
-                  </a:lnTo>
-                  <a:lnTo>
-                    <a:pt x="1575695" y="852956"/>
-                  </a:lnTo>
-                  <a:lnTo>
-                    <a:pt x="1647318" y="882511"/>
-                  </a:lnTo>
-                  <a:lnTo>
-                    <a:pt x="1718940" y="911403"/>
-                  </a:lnTo>
-                  <a:lnTo>
-                    <a:pt x="1790563" y="939646"/>
-                  </a:lnTo>
-                  <a:lnTo>
-                    <a:pt x="1862185" y="967256"/>
-                  </a:lnTo>
-                  <a:lnTo>
-                    <a:pt x="1933808" y="994245"/>
-                  </a:lnTo>
-                  <a:lnTo>
-                    <a:pt x="2005430" y="1020629"/>
-                  </a:lnTo>
-                  <a:lnTo>
-                    <a:pt x="2077053" y="1046421"/>
-                  </a:lnTo>
-                  <a:lnTo>
-                    <a:pt x="2148675" y="1071634"/>
-                  </a:lnTo>
-                  <a:lnTo>
-                    <a:pt x="2220298" y="1096281"/>
-                  </a:lnTo>
-                  <a:lnTo>
-                    <a:pt x="2291920" y="1120375"/>
-                  </a:lnTo>
-                  <a:lnTo>
-                    <a:pt x="2363543" y="1143928"/>
-                  </a:lnTo>
-                  <a:lnTo>
-                    <a:pt x="2435165" y="1166953"/>
-                  </a:lnTo>
-                  <a:lnTo>
-                    <a:pt x="2506788" y="1189460"/>
-                  </a:lnTo>
-                  <a:lnTo>
-                    <a:pt x="2578410" y="1211463"/>
-                  </a:lnTo>
-                  <a:lnTo>
-                    <a:pt x="2650033" y="1232971"/>
-                  </a:lnTo>
-                  <a:lnTo>
-                    <a:pt x="2721655" y="1253997"/>
-                  </a:lnTo>
-                  <a:lnTo>
-                    <a:pt x="2793278" y="1274551"/>
-                  </a:lnTo>
-                  <a:lnTo>
-                    <a:pt x="2864901" y="1294644"/>
-                  </a:lnTo>
-                  <a:lnTo>
-                    <a:pt x="2936523" y="1314285"/>
-                  </a:lnTo>
-                  <a:lnTo>
-                    <a:pt x="3008146" y="1333486"/>
-                  </a:lnTo>
-                  <a:lnTo>
-                    <a:pt x="3079768" y="1343475"/>
-                  </a:lnTo>
-                  <a:lnTo>
-                    <a:pt x="3151391" y="1348425"/>
-                  </a:lnTo>
-                  <a:lnTo>
-                    <a:pt x="3223013" y="1353346"/>
-                  </a:lnTo>
-                  <a:lnTo>
-                    <a:pt x="3294636" y="1358237"/>
-                  </a:lnTo>
-                  <a:lnTo>
-                    <a:pt x="3366258" y="1363098"/>
-                  </a:lnTo>
-                  <a:lnTo>
-                    <a:pt x="3437881" y="1367931"/>
-                  </a:lnTo>
-                  <a:lnTo>
-                    <a:pt x="3509503" y="1372734"/>
-                  </a:lnTo>
-                  <a:lnTo>
-                    <a:pt x="3581126" y="1377509"/>
-                  </a:lnTo>
-                  <a:lnTo>
-                    <a:pt x="3652748" y="1382255"/>
-                  </a:lnTo>
-                  <a:lnTo>
-                    <a:pt x="3724371" y="1386973"/>
-                  </a:lnTo>
-                  <a:lnTo>
-                    <a:pt x="3795993" y="1391663"/>
-                  </a:lnTo>
-                  <a:lnTo>
-                    <a:pt x="3867616" y="1396324"/>
-                  </a:lnTo>
-                  <a:lnTo>
-                    <a:pt x="3939238" y="1400957"/>
-                  </a:lnTo>
-                  <a:lnTo>
-                    <a:pt x="4010861" y="1405563"/>
-                  </a:lnTo>
-                  <a:lnTo>
-                    <a:pt x="4082483" y="1410141"/>
-                  </a:lnTo>
-                  <a:lnTo>
-                    <a:pt x="4154106" y="1414692"/>
-                  </a:lnTo>
-                  <a:lnTo>
-                    <a:pt x="4225729" y="1419215"/>
-                  </a:lnTo>
-                  <a:lnTo>
-                    <a:pt x="4297351" y="1423712"/>
-                  </a:lnTo>
-                  <a:lnTo>
-                    <a:pt x="4368974" y="1428181"/>
-                  </a:lnTo>
-                  <a:lnTo>
-                    <a:pt x="4440596" y="1432624"/>
-                  </a:lnTo>
-                  <a:lnTo>
-                    <a:pt x="4512219" y="1437040"/>
-                  </a:lnTo>
-                  <a:lnTo>
-                    <a:pt x="4583841" y="1441429"/>
-                  </a:lnTo>
-                  <a:lnTo>
-                    <a:pt x="4655464" y="1445792"/>
-                  </a:lnTo>
-                  <a:lnTo>
-                    <a:pt x="4727086" y="1450129"/>
-                  </a:lnTo>
-                  <a:lnTo>
-                    <a:pt x="4798709" y="1454441"/>
-                  </a:lnTo>
-                  <a:lnTo>
-                    <a:pt x="4870331" y="1458726"/>
-                  </a:lnTo>
-                  <a:lnTo>
-                    <a:pt x="4941954" y="1462985"/>
-                  </a:lnTo>
-                  <a:lnTo>
-                    <a:pt x="5013576" y="1467220"/>
-                  </a:lnTo>
-                  <a:lnTo>
-                    <a:pt x="5085199" y="1471428"/>
-                  </a:lnTo>
-                  <a:lnTo>
-                    <a:pt x="5156821" y="1475612"/>
-                  </a:lnTo>
-                  <a:lnTo>
-                    <a:pt x="5228444" y="1479770"/>
-                  </a:lnTo>
-                  <a:lnTo>
-                    <a:pt x="5300066" y="1483904"/>
-                  </a:lnTo>
-                  <a:lnTo>
-                    <a:pt x="5371689" y="1488013"/>
-                  </a:lnTo>
-                  <a:lnTo>
-                    <a:pt x="5443311" y="1492097"/>
-                  </a:lnTo>
-                  <a:lnTo>
-                    <a:pt x="5514934" y="1496156"/>
-                  </a:lnTo>
-                  <a:lnTo>
-                    <a:pt x="5586557" y="1500192"/>
-                  </a:lnTo>
-                  <a:lnTo>
-                    <a:pt x="5658179" y="1504203"/>
-                  </a:lnTo>
-                  <a:lnTo>
-                    <a:pt x="5729802" y="1508190"/>
-                  </a:lnTo>
-                  <a:lnTo>
-                    <a:pt x="5801424" y="1512153"/>
-                  </a:lnTo>
-                  <a:lnTo>
-                    <a:pt x="5873047" y="1516093"/>
-                  </a:lnTo>
-                  <a:lnTo>
-                    <a:pt x="5944669" y="1520009"/>
-                  </a:lnTo>
-                  <a:lnTo>
-                    <a:pt x="6016292" y="1523901"/>
-                  </a:lnTo>
-                  <a:lnTo>
-                    <a:pt x="6087914" y="1527771"/>
-                  </a:lnTo>
-                  <a:lnTo>
-                    <a:pt x="6159537" y="1531617"/>
-                  </a:lnTo>
-                  <a:lnTo>
-                    <a:pt x="6231159" y="1535439"/>
-                  </a:lnTo>
-                  <a:lnTo>
-                    <a:pt x="6302782" y="1539240"/>
-                  </a:lnTo>
-                  <a:lnTo>
-                    <a:pt x="6374404" y="1543017"/>
-                  </a:lnTo>
-                  <a:lnTo>
-                    <a:pt x="6446027" y="1546771"/>
-                  </a:lnTo>
-                  <a:lnTo>
-                    <a:pt x="6517649" y="1550504"/>
-                  </a:lnTo>
-                  <a:lnTo>
-                    <a:pt x="6589272" y="1554213"/>
-                  </a:lnTo>
-                  <a:lnTo>
-                    <a:pt x="6660894" y="1557901"/>
-                  </a:lnTo>
-                  <a:lnTo>
-                    <a:pt x="6732517" y="1561566"/>
-                  </a:lnTo>
-                  <a:lnTo>
-                    <a:pt x="6804139" y="1565210"/>
-                  </a:lnTo>
-                  <a:lnTo>
-                    <a:pt x="6875762" y="1568832"/>
-                  </a:lnTo>
-                  <a:lnTo>
-                    <a:pt x="6947385" y="1572432"/>
-                  </a:lnTo>
-                  <a:lnTo>
-                    <a:pt x="7019007" y="1576010"/>
-                  </a:lnTo>
-                  <a:lnTo>
-                    <a:pt x="7090630" y="1579567"/>
+                    <a:pt x="71622" y="49474"/>
+                  </a:lnTo>
+                  <a:lnTo>
+                    <a:pt x="143245" y="97829"/>
+                  </a:lnTo>
+                  <a:lnTo>
+                    <a:pt x="214867" y="145091"/>
+                  </a:lnTo>
+                  <a:lnTo>
+                    <a:pt x="286490" y="191283"/>
+                  </a:lnTo>
+                  <a:lnTo>
+                    <a:pt x="358112" y="236429"/>
+                  </a:lnTo>
+                  <a:lnTo>
+                    <a:pt x="429735" y="280555"/>
+                  </a:lnTo>
+                  <a:lnTo>
+                    <a:pt x="501357" y="323682"/>
+                  </a:lnTo>
+                  <a:lnTo>
+                    <a:pt x="572980" y="365833"/>
+                  </a:lnTo>
+                  <a:lnTo>
+                    <a:pt x="644602" y="407031"/>
+                  </a:lnTo>
+                  <a:lnTo>
+                    <a:pt x="716225" y="447297"/>
+                  </a:lnTo>
+                  <a:lnTo>
+                    <a:pt x="787847" y="486651"/>
+                  </a:lnTo>
+                  <a:lnTo>
+                    <a:pt x="859470" y="525116"/>
+                  </a:lnTo>
+                  <a:lnTo>
+                    <a:pt x="931092" y="562710"/>
+                  </a:lnTo>
+                  <a:lnTo>
+                    <a:pt x="1002715" y="599453"/>
+                  </a:lnTo>
+                  <a:lnTo>
+                    <a:pt x="1074337" y="635365"/>
+                  </a:lnTo>
+                  <a:lnTo>
+                    <a:pt x="1145960" y="670465"/>
+                  </a:lnTo>
+                  <a:lnTo>
+                    <a:pt x="1217582" y="704770"/>
+                  </a:lnTo>
+                  <a:lnTo>
+                    <a:pt x="1289205" y="738300"/>
+                  </a:lnTo>
+                  <a:lnTo>
+                    <a:pt x="1360827" y="771070"/>
+                  </a:lnTo>
+                  <a:lnTo>
+                    <a:pt x="1432450" y="803100"/>
+                  </a:lnTo>
+                  <a:lnTo>
+                    <a:pt x="1504073" y="834404"/>
+                  </a:lnTo>
+                  <a:lnTo>
+                    <a:pt x="1575695" y="865001"/>
+                  </a:lnTo>
+                  <a:lnTo>
+                    <a:pt x="1647318" y="894905"/>
+                  </a:lnTo>
+                  <a:lnTo>
+                    <a:pt x="1718940" y="924132"/>
+                  </a:lnTo>
+                  <a:lnTo>
+                    <a:pt x="1790563" y="952699"/>
+                  </a:lnTo>
+                  <a:lnTo>
+                    <a:pt x="1862185" y="980619"/>
+                  </a:lnTo>
+                  <a:lnTo>
+                    <a:pt x="1933808" y="1007907"/>
+                  </a:lnTo>
+                  <a:lnTo>
+                    <a:pt x="2005430" y="1034578"/>
+                  </a:lnTo>
+                  <a:lnTo>
+                    <a:pt x="2077053" y="1060646"/>
+                  </a:lnTo>
+                  <a:lnTo>
+                    <a:pt x="2148675" y="1086123"/>
+                  </a:lnTo>
+                  <a:lnTo>
+                    <a:pt x="2220298" y="1111025"/>
+                  </a:lnTo>
+                  <a:lnTo>
+                    <a:pt x="2291920" y="1135363"/>
+                  </a:lnTo>
+                  <a:lnTo>
+                    <a:pt x="2363543" y="1159150"/>
+                  </a:lnTo>
+                  <a:lnTo>
+                    <a:pt x="2435165" y="1182399"/>
+                  </a:lnTo>
+                  <a:lnTo>
+                    <a:pt x="2506788" y="1205122"/>
+                  </a:lnTo>
+                  <a:lnTo>
+                    <a:pt x="2578410" y="1227331"/>
+                  </a:lnTo>
+                  <a:lnTo>
+                    <a:pt x="2650033" y="1249038"/>
+                  </a:lnTo>
+                  <a:lnTo>
+                    <a:pt x="2721655" y="1270253"/>
+                  </a:lnTo>
+                  <a:lnTo>
+                    <a:pt x="2793278" y="1290989"/>
+                  </a:lnTo>
+                  <a:lnTo>
+                    <a:pt x="2864901" y="1311255"/>
+                  </a:lnTo>
+                  <a:lnTo>
+                    <a:pt x="2936523" y="1331063"/>
+                  </a:lnTo>
+                  <a:lnTo>
+                    <a:pt x="3008146" y="1350422"/>
+                  </a:lnTo>
+                  <a:lnTo>
+                    <a:pt x="3079768" y="1360638"/>
+                  </a:lnTo>
+                  <a:lnTo>
+                    <a:pt x="3151391" y="1365853"/>
+                  </a:lnTo>
+                  <a:lnTo>
+                    <a:pt x="3223013" y="1371035"/>
+                  </a:lnTo>
+                  <a:lnTo>
+                    <a:pt x="3294636" y="1376184"/>
+                  </a:lnTo>
+                  <a:lnTo>
+                    <a:pt x="3366258" y="1381301"/>
+                  </a:lnTo>
+                  <a:lnTo>
+                    <a:pt x="3437881" y="1386385"/>
+                  </a:lnTo>
+                  <a:lnTo>
+                    <a:pt x="3509503" y="1391438"/>
+                  </a:lnTo>
+                  <a:lnTo>
+                    <a:pt x="3581126" y="1396458"/>
+                  </a:lnTo>
+                  <a:lnTo>
+                    <a:pt x="3652748" y="1401447"/>
+                  </a:lnTo>
+                  <a:lnTo>
+                    <a:pt x="3724371" y="1406404"/>
+                  </a:lnTo>
+                  <a:lnTo>
+                    <a:pt x="3795993" y="1411330"/>
+                  </a:lnTo>
+                  <a:lnTo>
+                    <a:pt x="3867616" y="1416225"/>
+                  </a:lnTo>
+                  <a:lnTo>
+                    <a:pt x="3939238" y="1421089"/>
+                  </a:lnTo>
+                  <a:lnTo>
+                    <a:pt x="4010861" y="1425922"/>
+                  </a:lnTo>
+                  <a:lnTo>
+                    <a:pt x="4082483" y="1430725"/>
+                  </a:lnTo>
+                  <a:lnTo>
+                    <a:pt x="4154106" y="1435498"/>
+                  </a:lnTo>
+                  <a:lnTo>
+                    <a:pt x="4225729" y="1440240"/>
+                  </a:lnTo>
+                  <a:lnTo>
+                    <a:pt x="4297351" y="1444952"/>
+                  </a:lnTo>
+                  <a:lnTo>
+                    <a:pt x="4368974" y="1449635"/>
+                  </a:lnTo>
+                  <a:lnTo>
+                    <a:pt x="4440596" y="1454288"/>
+                  </a:lnTo>
+                  <a:lnTo>
+                    <a:pt x="4512219" y="1458912"/>
+                  </a:lnTo>
+                  <a:lnTo>
+                    <a:pt x="4583841" y="1463506"/>
+                  </a:lnTo>
+                  <a:lnTo>
+                    <a:pt x="4655464" y="1468072"/>
+                  </a:lnTo>
+                  <a:lnTo>
+                    <a:pt x="4727086" y="1472608"/>
+                  </a:lnTo>
+                  <a:lnTo>
+                    <a:pt x="4798709" y="1477116"/>
+                  </a:lnTo>
+                  <a:lnTo>
+                    <a:pt x="4870331" y="1481596"/>
+                  </a:lnTo>
+                  <a:lnTo>
+                    <a:pt x="4941954" y="1486047"/>
+                  </a:lnTo>
+                  <a:lnTo>
+                    <a:pt x="5013576" y="1490471"/>
+                  </a:lnTo>
+                  <a:lnTo>
+                    <a:pt x="5085199" y="1494866"/>
+                  </a:lnTo>
+                  <a:lnTo>
+                    <a:pt x="5156821" y="1499233"/>
+                  </a:lnTo>
+                  <a:lnTo>
+                    <a:pt x="5228444" y="1503573"/>
+                  </a:lnTo>
+                  <a:lnTo>
+                    <a:pt x="5300066" y="1507886"/>
+                  </a:lnTo>
+                  <a:lnTo>
+                    <a:pt x="5371689" y="1512171"/>
+                  </a:lnTo>
+                  <a:lnTo>
+                    <a:pt x="5443311" y="1516430"/>
+                  </a:lnTo>
+                  <a:lnTo>
+                    <a:pt x="5514934" y="1520661"/>
+                  </a:lnTo>
+                  <a:lnTo>
+                    <a:pt x="5586557" y="1524866"/>
+                  </a:lnTo>
+                  <a:lnTo>
+                    <a:pt x="5658179" y="1529044"/>
+                  </a:lnTo>
+                  <a:lnTo>
+                    <a:pt x="5729802" y="1533196"/>
+                  </a:lnTo>
+                  <a:lnTo>
+                    <a:pt x="5801424" y="1537321"/>
+                  </a:lnTo>
+                  <a:lnTo>
+                    <a:pt x="5873047" y="1541421"/>
+                  </a:lnTo>
+                  <a:lnTo>
+                    <a:pt x="5944669" y="1545495"/>
+                  </a:lnTo>
+                  <a:lnTo>
+                    <a:pt x="6016292" y="1549543"/>
+                  </a:lnTo>
+                  <a:lnTo>
+                    <a:pt x="6087914" y="1553565"/>
+                  </a:lnTo>
+                  <a:lnTo>
+                    <a:pt x="6159537" y="1557562"/>
+                  </a:lnTo>
+                  <a:lnTo>
+                    <a:pt x="6231159" y="1561534"/>
+                  </a:lnTo>
+                  <a:lnTo>
+                    <a:pt x="6302782" y="1565481"/>
+                  </a:lnTo>
+                  <a:lnTo>
+                    <a:pt x="6374404" y="1569402"/>
+                  </a:lnTo>
+                  <a:lnTo>
+                    <a:pt x="6446027" y="1573299"/>
+                  </a:lnTo>
+                  <a:lnTo>
+                    <a:pt x="6517649" y="1577172"/>
+                  </a:lnTo>
+                  <a:lnTo>
+                    <a:pt x="6589272" y="1581020"/>
+                  </a:lnTo>
+                  <a:lnTo>
+                    <a:pt x="6660894" y="1584844"/>
+                  </a:lnTo>
+                  <a:lnTo>
+                    <a:pt x="6732517" y="1588643"/>
+                  </a:lnTo>
+                  <a:lnTo>
+                    <a:pt x="6804139" y="1592419"/>
+                  </a:lnTo>
+                  <a:lnTo>
+                    <a:pt x="6875762" y="1596170"/>
+                  </a:lnTo>
+                  <a:lnTo>
+                    <a:pt x="6947385" y="1599898"/>
+                  </a:lnTo>
+                  <a:lnTo>
+                    <a:pt x="7019007" y="1603603"/>
+                  </a:lnTo>
+                  <a:lnTo>
+                    <a:pt x="7090630" y="1607284"/>
                   </a:lnTo>
                 </a:path>
               </a:pathLst>
@@ -4001,309 +4001,309 @@
           </p:nvSpPr>
           <p:spPr>
             <a:xfrm>
-              <a:off x="1172049" y="4487360"/>
-              <a:ext cx="7090630" cy="840591"/>
+              <a:off x="1172049" y="4472583"/>
+              <a:ext cx="7090630" cy="857747"/>
             </a:xfrm>
             <a:custGeom>
               <a:avLst/>
               <a:pathLst>
-                <a:path w="7090630" h="840591">
+                <a:path w="7090630" h="857747">
                   <a:moveTo>
-                    <a:pt x="7090630" y="840591"/>
+                    <a:pt x="7090630" y="857747"/>
                   </a:moveTo>
                   <a:lnTo>
-                    <a:pt x="7019007" y="835327"/>
-                  </a:lnTo>
-                  <a:lnTo>
-                    <a:pt x="6947385" y="829941"/>
-                  </a:lnTo>
-                  <a:lnTo>
-                    <a:pt x="6875762" y="824432"/>
-                  </a:lnTo>
-                  <a:lnTo>
-                    <a:pt x="6804139" y="818796"/>
-                  </a:lnTo>
-                  <a:lnTo>
-                    <a:pt x="6732517" y="813031"/>
-                  </a:lnTo>
-                  <a:lnTo>
-                    <a:pt x="6660894" y="807133"/>
-                  </a:lnTo>
-                  <a:lnTo>
-                    <a:pt x="6589272" y="801100"/>
-                  </a:lnTo>
-                  <a:lnTo>
-                    <a:pt x="6517649" y="794929"/>
-                  </a:lnTo>
-                  <a:lnTo>
-                    <a:pt x="6446027" y="788616"/>
-                  </a:lnTo>
-                  <a:lnTo>
-                    <a:pt x="6374404" y="782158"/>
-                  </a:lnTo>
-                  <a:lnTo>
-                    <a:pt x="6302782" y="775552"/>
-                  </a:lnTo>
-                  <a:lnTo>
-                    <a:pt x="6231159" y="768794"/>
-                  </a:lnTo>
-                  <a:lnTo>
-                    <a:pt x="6159537" y="761880"/>
-                  </a:lnTo>
-                  <a:lnTo>
-                    <a:pt x="6087914" y="754808"/>
-                  </a:lnTo>
-                  <a:lnTo>
-                    <a:pt x="6016292" y="747574"/>
-                  </a:lnTo>
-                  <a:lnTo>
-                    <a:pt x="5944669" y="740174"/>
-                  </a:lnTo>
-                  <a:lnTo>
-                    <a:pt x="5873047" y="732603"/>
-                  </a:lnTo>
-                  <a:lnTo>
-                    <a:pt x="5801424" y="724859"/>
-                  </a:lnTo>
-                  <a:lnTo>
-                    <a:pt x="5729802" y="716937"/>
-                  </a:lnTo>
-                  <a:lnTo>
-                    <a:pt x="5658179" y="708834"/>
-                  </a:lnTo>
-                  <a:lnTo>
-                    <a:pt x="5586557" y="700544"/>
-                  </a:lnTo>
-                  <a:lnTo>
-                    <a:pt x="5514934" y="692064"/>
-                  </a:lnTo>
-                  <a:lnTo>
-                    <a:pt x="5443311" y="683389"/>
-                  </a:lnTo>
-                  <a:lnTo>
-                    <a:pt x="5371689" y="674515"/>
-                  </a:lnTo>
-                  <a:lnTo>
-                    <a:pt x="5300066" y="665437"/>
-                  </a:lnTo>
-                  <a:lnTo>
-                    <a:pt x="5228444" y="656150"/>
-                  </a:lnTo>
-                  <a:lnTo>
-                    <a:pt x="5156821" y="646651"/>
-                  </a:lnTo>
-                  <a:lnTo>
-                    <a:pt x="5085199" y="636933"/>
-                  </a:lnTo>
-                  <a:lnTo>
-                    <a:pt x="5013576" y="626993"/>
-                  </a:lnTo>
-                  <a:lnTo>
-                    <a:pt x="4941954" y="616824"/>
-                  </a:lnTo>
-                  <a:lnTo>
-                    <a:pt x="4870331" y="606421"/>
-                  </a:lnTo>
-                  <a:lnTo>
-                    <a:pt x="4798709" y="595780"/>
-                  </a:lnTo>
-                  <a:lnTo>
-                    <a:pt x="4727086" y="584894"/>
-                  </a:lnTo>
-                  <a:lnTo>
-                    <a:pt x="4655464" y="573759"/>
-                  </a:lnTo>
-                  <a:lnTo>
-                    <a:pt x="4583841" y="562368"/>
-                  </a:lnTo>
-                  <a:lnTo>
-                    <a:pt x="4512219" y="550715"/>
-                  </a:lnTo>
-                  <a:lnTo>
-                    <a:pt x="4440596" y="538795"/>
-                  </a:lnTo>
-                  <a:lnTo>
-                    <a:pt x="4368974" y="526601"/>
-                  </a:lnTo>
-                  <a:lnTo>
-                    <a:pt x="4297351" y="514127"/>
-                  </a:lnTo>
-                  <a:lnTo>
-                    <a:pt x="4225729" y="501366"/>
-                  </a:lnTo>
-                  <a:lnTo>
-                    <a:pt x="4154106" y="488313"/>
-                  </a:lnTo>
-                  <a:lnTo>
-                    <a:pt x="4082483" y="474960"/>
-                  </a:lnTo>
-                  <a:lnTo>
-                    <a:pt x="4010861" y="461300"/>
-                  </a:lnTo>
-                  <a:lnTo>
-                    <a:pt x="3939238" y="447327"/>
-                  </a:lnTo>
-                  <a:lnTo>
-                    <a:pt x="3867616" y="433033"/>
-                  </a:lnTo>
-                  <a:lnTo>
-                    <a:pt x="3795993" y="418411"/>
-                  </a:lnTo>
-                  <a:lnTo>
-                    <a:pt x="3724371" y="403453"/>
-                  </a:lnTo>
-                  <a:lnTo>
-                    <a:pt x="3652748" y="388151"/>
-                  </a:lnTo>
-                  <a:lnTo>
-                    <a:pt x="3581126" y="372498"/>
-                  </a:lnTo>
-                  <a:lnTo>
-                    <a:pt x="3509503" y="356486"/>
-                  </a:lnTo>
-                  <a:lnTo>
-                    <a:pt x="3437881" y="340106"/>
-                  </a:lnTo>
-                  <a:lnTo>
-                    <a:pt x="3366258" y="323351"/>
-                  </a:lnTo>
-                  <a:lnTo>
-                    <a:pt x="3294636" y="306210"/>
-                  </a:lnTo>
-                  <a:lnTo>
-                    <a:pt x="3223013" y="288676"/>
-                  </a:lnTo>
-                  <a:lnTo>
-                    <a:pt x="3151391" y="270739"/>
-                  </a:lnTo>
-                  <a:lnTo>
-                    <a:pt x="3079768" y="252391"/>
-                  </a:lnTo>
-                  <a:lnTo>
-                    <a:pt x="3008146" y="238630"/>
-                  </a:lnTo>
-                  <a:lnTo>
-                    <a:pt x="2936523" y="233620"/>
-                  </a:lnTo>
-                  <a:lnTo>
-                    <a:pt x="2864901" y="228580"/>
-                  </a:lnTo>
-                  <a:lnTo>
-                    <a:pt x="2793278" y="223510"/>
-                  </a:lnTo>
-                  <a:lnTo>
-                    <a:pt x="2721655" y="218408"/>
-                  </a:lnTo>
-                  <a:lnTo>
-                    <a:pt x="2650033" y="213277"/>
-                  </a:lnTo>
-                  <a:lnTo>
-                    <a:pt x="2578410" y="208114"/>
-                  </a:lnTo>
-                  <a:lnTo>
-                    <a:pt x="2506788" y="202920"/>
-                  </a:lnTo>
-                  <a:lnTo>
-                    <a:pt x="2435165" y="197695"/>
-                  </a:lnTo>
-                  <a:lnTo>
-                    <a:pt x="2363543" y="192438"/>
-                  </a:lnTo>
-                  <a:lnTo>
-                    <a:pt x="2291920" y="187150"/>
-                  </a:lnTo>
-                  <a:lnTo>
-                    <a:pt x="2220298" y="181830"/>
-                  </a:lnTo>
-                  <a:lnTo>
-                    <a:pt x="2148675" y="176478"/>
-                  </a:lnTo>
-                  <a:lnTo>
-                    <a:pt x="2077053" y="171093"/>
-                  </a:lnTo>
-                  <a:lnTo>
-                    <a:pt x="2005430" y="165676"/>
-                  </a:lnTo>
-                  <a:lnTo>
-                    <a:pt x="1933808" y="160227"/>
-                  </a:lnTo>
-                  <a:lnTo>
-                    <a:pt x="1862185" y="154744"/>
-                  </a:lnTo>
-                  <a:lnTo>
-                    <a:pt x="1790563" y="149229"/>
-                  </a:lnTo>
-                  <a:lnTo>
-                    <a:pt x="1718940" y="143680"/>
-                  </a:lnTo>
-                  <a:lnTo>
-                    <a:pt x="1647318" y="138098"/>
-                  </a:lnTo>
-                  <a:lnTo>
-                    <a:pt x="1575695" y="132482"/>
-                  </a:lnTo>
-                  <a:lnTo>
-                    <a:pt x="1504073" y="126833"/>
-                  </a:lnTo>
-                  <a:lnTo>
-                    <a:pt x="1432450" y="121149"/>
-                  </a:lnTo>
-                  <a:lnTo>
-                    <a:pt x="1360827" y="115431"/>
-                  </a:lnTo>
-                  <a:lnTo>
-                    <a:pt x="1289205" y="109679"/>
-                  </a:lnTo>
-                  <a:lnTo>
-                    <a:pt x="1217582" y="103892"/>
-                  </a:lnTo>
-                  <a:lnTo>
-                    <a:pt x="1145960" y="98070"/>
-                  </a:lnTo>
-                  <a:lnTo>
-                    <a:pt x="1074337" y="92213"/>
-                  </a:lnTo>
-                  <a:lnTo>
-                    <a:pt x="1002715" y="86320"/>
-                  </a:lnTo>
-                  <a:lnTo>
-                    <a:pt x="931092" y="80392"/>
-                  </a:lnTo>
-                  <a:lnTo>
-                    <a:pt x="859470" y="74429"/>
-                  </a:lnTo>
-                  <a:lnTo>
-                    <a:pt x="787847" y="68429"/>
-                  </a:lnTo>
-                  <a:lnTo>
-                    <a:pt x="716225" y="62394"/>
-                  </a:lnTo>
-                  <a:lnTo>
-                    <a:pt x="644602" y="56322"/>
-                  </a:lnTo>
-                  <a:lnTo>
-                    <a:pt x="572980" y="50213"/>
-                  </a:lnTo>
-                  <a:lnTo>
-                    <a:pt x="501357" y="44067"/>
-                  </a:lnTo>
-                  <a:lnTo>
-                    <a:pt x="429735" y="37885"/>
-                  </a:lnTo>
-                  <a:lnTo>
-                    <a:pt x="358112" y="31665"/>
-                  </a:lnTo>
-                  <a:lnTo>
-                    <a:pt x="286490" y="25408"/>
-                  </a:lnTo>
-                  <a:lnTo>
-                    <a:pt x="214867" y="19113"/>
-                  </a:lnTo>
-                  <a:lnTo>
-                    <a:pt x="143245" y="12780"/>
-                  </a:lnTo>
-                  <a:lnTo>
-                    <a:pt x="71622" y="6409"/>
+                    <a:pt x="7019007" y="852494"/>
+                  </a:lnTo>
+                  <a:lnTo>
+                    <a:pt x="6947385" y="847119"/>
+                  </a:lnTo>
+                  <a:lnTo>
+                    <a:pt x="6875762" y="841621"/>
+                  </a:lnTo>
+                  <a:lnTo>
+                    <a:pt x="6804139" y="835995"/>
+                  </a:lnTo>
+                  <a:lnTo>
+                    <a:pt x="6732517" y="830238"/>
+                  </a:lnTo>
+                  <a:lnTo>
+                    <a:pt x="6660894" y="824349"/>
+                  </a:lnTo>
+                  <a:lnTo>
+                    <a:pt x="6589272" y="818323"/>
+                  </a:lnTo>
+                  <a:lnTo>
+                    <a:pt x="6517649" y="812157"/>
+                  </a:lnTo>
+                  <a:lnTo>
+                    <a:pt x="6446027" y="805849"/>
+                  </a:lnTo>
+                  <a:lnTo>
+                    <a:pt x="6374404" y="799395"/>
+                  </a:lnTo>
+                  <a:lnTo>
+                    <a:pt x="6302782" y="792791"/>
+                  </a:lnTo>
+                  <a:lnTo>
+                    <a:pt x="6231159" y="786035"/>
+                  </a:lnTo>
+                  <a:lnTo>
+                    <a:pt x="6159537" y="779122"/>
+                  </a:lnTo>
+                  <a:lnTo>
+                    <a:pt x="6087914" y="772049"/>
+                  </a:lnTo>
+                  <a:lnTo>
+                    <a:pt x="6016292" y="764812"/>
+                  </a:lnTo>
+                  <a:lnTo>
+                    <a:pt x="5944669" y="757408"/>
+                  </a:lnTo>
+                  <a:lnTo>
+                    <a:pt x="5873047" y="749833"/>
+                  </a:lnTo>
+                  <a:lnTo>
+                    <a:pt x="5801424" y="742082"/>
+                  </a:lnTo>
+                  <a:lnTo>
+                    <a:pt x="5729802" y="734152"/>
+                  </a:lnTo>
+                  <a:lnTo>
+                    <a:pt x="5658179" y="726038"/>
+                  </a:lnTo>
+                  <a:lnTo>
+                    <a:pt x="5586557" y="717736"/>
+                  </a:lnTo>
+                  <a:lnTo>
+                    <a:pt x="5514934" y="709242"/>
+                  </a:lnTo>
+                  <a:lnTo>
+                    <a:pt x="5443311" y="700552"/>
+                  </a:lnTo>
+                  <a:lnTo>
+                    <a:pt x="5371689" y="691660"/>
+                  </a:lnTo>
+                  <a:lnTo>
+                    <a:pt x="5300066" y="682563"/>
+                  </a:lnTo>
+                  <a:lnTo>
+                    <a:pt x="5228444" y="673255"/>
+                  </a:lnTo>
+                  <a:lnTo>
+                    <a:pt x="5156821" y="663731"/>
+                  </a:lnTo>
+                  <a:lnTo>
+                    <a:pt x="5085199" y="653987"/>
+                  </a:lnTo>
+                  <a:lnTo>
+                    <a:pt x="5013576" y="644017"/>
+                  </a:lnTo>
+                  <a:lnTo>
+                    <a:pt x="4941954" y="633817"/>
+                  </a:lnTo>
+                  <a:lnTo>
+                    <a:pt x="4870331" y="623381"/>
+                  </a:lnTo>
+                  <a:lnTo>
+                    <a:pt x="4798709" y="612703"/>
+                  </a:lnTo>
+                  <a:lnTo>
+                    <a:pt x="4727086" y="601777"/>
+                  </a:lnTo>
+                  <a:lnTo>
+                    <a:pt x="4655464" y="590599"/>
+                  </a:lnTo>
+                  <a:lnTo>
+                    <a:pt x="4583841" y="579162"/>
+                  </a:lnTo>
+                  <a:lnTo>
+                    <a:pt x="4512219" y="567461"/>
+                  </a:lnTo>
+                  <a:lnTo>
+                    <a:pt x="4440596" y="555488"/>
+                  </a:lnTo>
+                  <a:lnTo>
+                    <a:pt x="4368974" y="543239"/>
+                  </a:lnTo>
+                  <a:lnTo>
+                    <a:pt x="4297351" y="530705"/>
+                  </a:lnTo>
+                  <a:lnTo>
+                    <a:pt x="4225729" y="517882"/>
+                  </a:lnTo>
+                  <a:lnTo>
+                    <a:pt x="4154106" y="504762"/>
+                  </a:lnTo>
+                  <a:lnTo>
+                    <a:pt x="4082483" y="491338"/>
+                  </a:lnTo>
+                  <a:lnTo>
+                    <a:pt x="4010861" y="477603"/>
+                  </a:lnTo>
+                  <a:lnTo>
+                    <a:pt x="3939238" y="463551"/>
+                  </a:lnTo>
+                  <a:lnTo>
+                    <a:pt x="3867616" y="449173"/>
+                  </a:lnTo>
+                  <a:lnTo>
+                    <a:pt x="3795993" y="434462"/>
+                  </a:lnTo>
+                  <a:lnTo>
+                    <a:pt x="3724371" y="419411"/>
+                  </a:lnTo>
+                  <a:lnTo>
+                    <a:pt x="3652748" y="404011"/>
+                  </a:lnTo>
+                  <a:lnTo>
+                    <a:pt x="3581126" y="388255"/>
+                  </a:lnTo>
+                  <a:lnTo>
+                    <a:pt x="3509503" y="372134"/>
+                  </a:lnTo>
+                  <a:lnTo>
+                    <a:pt x="3437881" y="355640"/>
+                  </a:lnTo>
+                  <a:lnTo>
+                    <a:pt x="3366258" y="338764"/>
+                  </a:lnTo>
+                  <a:lnTo>
+                    <a:pt x="3294636" y="321498"/>
+                  </a:lnTo>
+                  <a:lnTo>
+                    <a:pt x="3223013" y="303832"/>
+                  </a:lnTo>
+                  <a:lnTo>
+                    <a:pt x="3151391" y="285757"/>
+                  </a:lnTo>
+                  <a:lnTo>
+                    <a:pt x="3079768" y="267263"/>
+                  </a:lnTo>
+                  <a:lnTo>
+                    <a:pt x="3008146" y="253309"/>
+                  </a:lnTo>
+                  <a:lnTo>
+                    <a:pt x="2936523" y="248028"/>
+                  </a:lnTo>
+                  <a:lnTo>
+                    <a:pt x="2864901" y="242713"/>
+                  </a:lnTo>
+                  <a:lnTo>
+                    <a:pt x="2793278" y="237364"/>
+                  </a:lnTo>
+                  <a:lnTo>
+                    <a:pt x="2721655" y="231982"/>
+                  </a:lnTo>
+                  <a:lnTo>
+                    <a:pt x="2650033" y="226565"/>
+                  </a:lnTo>
+                  <a:lnTo>
+                    <a:pt x="2578410" y="221114"/>
+                  </a:lnTo>
+                  <a:lnTo>
+                    <a:pt x="2506788" y="215628"/>
+                  </a:lnTo>
+                  <a:lnTo>
+                    <a:pt x="2435165" y="210107"/>
+                  </a:lnTo>
+                  <a:lnTo>
+                    <a:pt x="2363543" y="204551"/>
+                  </a:lnTo>
+                  <a:lnTo>
+                    <a:pt x="2291920" y="198960"/>
+                  </a:lnTo>
+                  <a:lnTo>
+                    <a:pt x="2220298" y="193334"/>
+                  </a:lnTo>
+                  <a:lnTo>
+                    <a:pt x="2148675" y="187671"/>
+                  </a:lnTo>
+                  <a:lnTo>
+                    <a:pt x="2077053" y="181973"/>
+                  </a:lnTo>
+                  <a:lnTo>
+                    <a:pt x="2005430" y="176238"/>
+                  </a:lnTo>
+                  <a:lnTo>
+                    <a:pt x="1933808" y="170467"/>
+                  </a:lnTo>
+                  <a:lnTo>
+                    <a:pt x="1862185" y="164660"/>
+                  </a:lnTo>
+                  <a:lnTo>
+                    <a:pt x="1790563" y="158815"/>
+                  </a:lnTo>
+                  <a:lnTo>
+                    <a:pt x="1718940" y="152934"/>
+                  </a:lnTo>
+                  <a:lnTo>
+                    <a:pt x="1647318" y="147015"/>
+                  </a:lnTo>
+                  <a:lnTo>
+                    <a:pt x="1575695" y="141058"/>
+                  </a:lnTo>
+                  <a:lnTo>
+                    <a:pt x="1504073" y="135064"/>
+                  </a:lnTo>
+                  <a:lnTo>
+                    <a:pt x="1432450" y="129031"/>
+                  </a:lnTo>
+                  <a:lnTo>
+                    <a:pt x="1360827" y="122960"/>
+                  </a:lnTo>
+                  <a:lnTo>
+                    <a:pt x="1289205" y="116851"/>
+                  </a:lnTo>
+                  <a:lnTo>
+                    <a:pt x="1217582" y="110703"/>
+                  </a:lnTo>
+                  <a:lnTo>
+                    <a:pt x="1145960" y="104515"/>
+                  </a:lnTo>
+                  <a:lnTo>
+                    <a:pt x="1074337" y="98289"/>
+                  </a:lnTo>
+                  <a:lnTo>
+                    <a:pt x="1002715" y="92023"/>
+                  </a:lnTo>
+                  <a:lnTo>
+                    <a:pt x="931092" y="85717"/>
+                  </a:lnTo>
+                  <a:lnTo>
+                    <a:pt x="859470" y="79371"/>
+                  </a:lnTo>
+                  <a:lnTo>
+                    <a:pt x="787847" y="72984"/>
+                  </a:lnTo>
+                  <a:lnTo>
+                    <a:pt x="716225" y="66557"/>
+                  </a:lnTo>
+                  <a:lnTo>
+                    <a:pt x="644602" y="60090"/>
+                  </a:lnTo>
+                  <a:lnTo>
+                    <a:pt x="572980" y="53581"/>
+                  </a:lnTo>
+                  <a:lnTo>
+                    <a:pt x="501357" y="47031"/>
+                  </a:lnTo>
+                  <a:lnTo>
+                    <a:pt x="429735" y="40439"/>
+                  </a:lnTo>
+                  <a:lnTo>
+                    <a:pt x="358112" y="33805"/>
+                  </a:lnTo>
+                  <a:lnTo>
+                    <a:pt x="286490" y="27129"/>
+                  </a:lnTo>
+                  <a:lnTo>
+                    <a:pt x="214867" y="20411"/>
+                  </a:lnTo>
+                  <a:lnTo>
+                    <a:pt x="143245" y="13650"/>
+                  </a:lnTo>
+                  <a:lnTo>
+                    <a:pt x="71622" y="6847"/>
                   </a:lnTo>
                   <a:lnTo>
                     <a:pt x="0" y="0"/>
@@ -4326,312 +4326,312 @@
           </p:nvSpPr>
           <p:spPr>
             <a:xfrm>
-              <a:off x="1172049" y="4033635"/>
-              <a:ext cx="7090630" cy="1155743"/>
+              <a:off x="1172049" y="4017155"/>
+              <a:ext cx="7090630" cy="1177477"/>
             </a:xfrm>
             <a:custGeom>
               <a:avLst/>
               <a:pathLst>
-                <a:path w="7090630" h="1155743">
+                <a:path w="7090630" h="1177477">
                   <a:moveTo>
                     <a:pt x="0" y="0"/>
                   </a:moveTo>
                   <a:lnTo>
-                    <a:pt x="71622" y="21714"/>
-                  </a:lnTo>
-                  <a:lnTo>
-                    <a:pt x="143245" y="43119"/>
-                  </a:lnTo>
-                  <a:lnTo>
-                    <a:pt x="214867" y="64220"/>
-                  </a:lnTo>
-                  <a:lnTo>
-                    <a:pt x="286490" y="85019"/>
-                  </a:lnTo>
-                  <a:lnTo>
-                    <a:pt x="358112" y="105522"/>
-                  </a:lnTo>
-                  <a:lnTo>
-                    <a:pt x="429735" y="125733"/>
-                  </a:lnTo>
-                  <a:lnTo>
-                    <a:pt x="501357" y="145655"/>
-                  </a:lnTo>
-                  <a:lnTo>
-                    <a:pt x="572980" y="165294"/>
-                  </a:lnTo>
-                  <a:lnTo>
-                    <a:pt x="644602" y="184653"/>
-                  </a:lnTo>
-                  <a:lnTo>
-                    <a:pt x="716225" y="203736"/>
-                  </a:lnTo>
-                  <a:lnTo>
-                    <a:pt x="787847" y="222547"/>
-                  </a:lnTo>
-                  <a:lnTo>
-                    <a:pt x="859470" y="241090"/>
-                  </a:lnTo>
-                  <a:lnTo>
-                    <a:pt x="931092" y="259369"/>
-                  </a:lnTo>
-                  <a:lnTo>
-                    <a:pt x="1002715" y="277387"/>
-                  </a:lnTo>
-                  <a:lnTo>
-                    <a:pt x="1074337" y="295148"/>
-                  </a:lnTo>
-                  <a:lnTo>
-                    <a:pt x="1145960" y="312656"/>
-                  </a:lnTo>
-                  <a:lnTo>
-                    <a:pt x="1217582" y="329915"/>
-                  </a:lnTo>
-                  <a:lnTo>
-                    <a:pt x="1289205" y="346928"/>
-                  </a:lnTo>
-                  <a:lnTo>
-                    <a:pt x="1360827" y="363698"/>
-                  </a:lnTo>
-                  <a:lnTo>
-                    <a:pt x="1432450" y="380229"/>
-                  </a:lnTo>
-                  <a:lnTo>
-                    <a:pt x="1504073" y="396525"/>
-                  </a:lnTo>
-                  <a:lnTo>
-                    <a:pt x="1575695" y="412588"/>
-                  </a:lnTo>
-                  <a:lnTo>
-                    <a:pt x="1647318" y="428423"/>
-                  </a:lnTo>
-                  <a:lnTo>
-                    <a:pt x="1718940" y="444031"/>
-                  </a:lnTo>
-                  <a:lnTo>
-                    <a:pt x="1790563" y="459418"/>
-                  </a:lnTo>
-                  <a:lnTo>
-                    <a:pt x="1862185" y="474585"/>
-                  </a:lnTo>
-                  <a:lnTo>
-                    <a:pt x="1933808" y="489536"/>
-                  </a:lnTo>
-                  <a:lnTo>
-                    <a:pt x="2005430" y="504273"/>
-                  </a:lnTo>
-                  <a:lnTo>
-                    <a:pt x="2077053" y="518801"/>
-                  </a:lnTo>
-                  <a:lnTo>
-                    <a:pt x="2148675" y="533122"/>
-                  </a:lnTo>
-                  <a:lnTo>
-                    <a:pt x="2220298" y="547238"/>
-                  </a:lnTo>
-                  <a:lnTo>
-                    <a:pt x="2291920" y="561154"/>
-                  </a:lnTo>
-                  <a:lnTo>
-                    <a:pt x="2363543" y="574871"/>
-                  </a:lnTo>
-                  <a:lnTo>
-                    <a:pt x="2435165" y="588392"/>
-                  </a:lnTo>
-                  <a:lnTo>
-                    <a:pt x="2506788" y="601721"/>
-                  </a:lnTo>
-                  <a:lnTo>
-                    <a:pt x="2578410" y="614860"/>
-                  </a:lnTo>
-                  <a:lnTo>
-                    <a:pt x="2650033" y="627812"/>
-                  </a:lnTo>
-                  <a:lnTo>
-                    <a:pt x="2721655" y="640579"/>
-                  </a:lnTo>
-                  <a:lnTo>
-                    <a:pt x="2793278" y="653164"/>
-                  </a:lnTo>
-                  <a:lnTo>
-                    <a:pt x="2864901" y="665570"/>
-                  </a:lnTo>
-                  <a:lnTo>
-                    <a:pt x="2936523" y="677799"/>
-                  </a:lnTo>
-                  <a:lnTo>
-                    <a:pt x="3008146" y="689853"/>
-                  </a:lnTo>
-                  <a:lnTo>
-                    <a:pt x="3079768" y="701736"/>
-                  </a:lnTo>
-                  <a:lnTo>
-                    <a:pt x="3151391" y="713449"/>
-                  </a:lnTo>
-                  <a:lnTo>
-                    <a:pt x="3223013" y="724996"/>
-                  </a:lnTo>
-                  <a:lnTo>
-                    <a:pt x="3294636" y="736378"/>
-                  </a:lnTo>
-                  <a:lnTo>
-                    <a:pt x="3366258" y="747598"/>
-                  </a:lnTo>
-                  <a:lnTo>
-                    <a:pt x="3437881" y="758658"/>
-                  </a:lnTo>
-                  <a:lnTo>
-                    <a:pt x="3509503" y="769560"/>
-                  </a:lnTo>
-                  <a:lnTo>
-                    <a:pt x="3581126" y="780307"/>
-                  </a:lnTo>
-                  <a:lnTo>
-                    <a:pt x="3652748" y="790900"/>
-                  </a:lnTo>
-                  <a:lnTo>
-                    <a:pt x="3724371" y="801343"/>
-                  </a:lnTo>
-                  <a:lnTo>
-                    <a:pt x="3795993" y="811637"/>
-                  </a:lnTo>
-                  <a:lnTo>
-                    <a:pt x="3867616" y="821784"/>
-                  </a:lnTo>
-                  <a:lnTo>
-                    <a:pt x="3939238" y="831787"/>
-                  </a:lnTo>
-                  <a:lnTo>
-                    <a:pt x="4010861" y="841647"/>
-                  </a:lnTo>
-                  <a:lnTo>
-                    <a:pt x="4082483" y="851366"/>
-                  </a:lnTo>
-                  <a:lnTo>
-                    <a:pt x="4154106" y="860947"/>
-                  </a:lnTo>
-                  <a:lnTo>
-                    <a:pt x="4225729" y="870391"/>
-                  </a:lnTo>
-                  <a:lnTo>
-                    <a:pt x="4297351" y="879701"/>
-                  </a:lnTo>
-                  <a:lnTo>
-                    <a:pt x="4368974" y="888878"/>
-                  </a:lnTo>
-                  <a:lnTo>
-                    <a:pt x="4440596" y="897925"/>
-                  </a:lnTo>
-                  <a:lnTo>
-                    <a:pt x="4512219" y="906842"/>
-                  </a:lnTo>
-                  <a:lnTo>
-                    <a:pt x="4583841" y="915632"/>
-                  </a:lnTo>
-                  <a:lnTo>
-                    <a:pt x="4655464" y="924297"/>
-                  </a:lnTo>
-                  <a:lnTo>
-                    <a:pt x="4727086" y="932839"/>
-                  </a:lnTo>
-                  <a:lnTo>
-                    <a:pt x="4798709" y="941258"/>
-                  </a:lnTo>
-                  <a:lnTo>
-                    <a:pt x="4870331" y="949558"/>
-                  </a:lnTo>
-                  <a:lnTo>
-                    <a:pt x="4941954" y="957740"/>
-                  </a:lnTo>
-                  <a:lnTo>
-                    <a:pt x="5013576" y="965805"/>
-                  </a:lnTo>
-                  <a:lnTo>
-                    <a:pt x="5085199" y="973755"/>
-                  </a:lnTo>
-                  <a:lnTo>
-                    <a:pt x="5156821" y="981591"/>
-                  </a:lnTo>
-                  <a:lnTo>
-                    <a:pt x="5228444" y="989316"/>
-                  </a:lnTo>
-                  <a:lnTo>
-                    <a:pt x="5300066" y="996931"/>
-                  </a:lnTo>
-                  <a:lnTo>
-                    <a:pt x="5371689" y="1004437"/>
-                  </a:lnTo>
-                  <a:lnTo>
-                    <a:pt x="5443311" y="1011837"/>
-                  </a:lnTo>
-                  <a:lnTo>
-                    <a:pt x="5514934" y="1019131"/>
-                  </a:lnTo>
-                  <a:lnTo>
-                    <a:pt x="5586557" y="1026321"/>
-                  </a:lnTo>
-                  <a:lnTo>
-                    <a:pt x="5658179" y="1033408"/>
-                  </a:lnTo>
-                  <a:lnTo>
-                    <a:pt x="5729802" y="1040394"/>
-                  </a:lnTo>
-                  <a:lnTo>
-                    <a:pt x="5801424" y="1047281"/>
-                  </a:lnTo>
-                  <a:lnTo>
-                    <a:pt x="5873047" y="1054070"/>
-                  </a:lnTo>
-                  <a:lnTo>
-                    <a:pt x="5944669" y="1060762"/>
-                  </a:lnTo>
-                  <a:lnTo>
-                    <a:pt x="6016292" y="1067359"/>
-                  </a:lnTo>
-                  <a:lnTo>
-                    <a:pt x="6087914" y="1073861"/>
-                  </a:lnTo>
-                  <a:lnTo>
-                    <a:pt x="6159537" y="1080271"/>
-                  </a:lnTo>
-                  <a:lnTo>
-                    <a:pt x="6231159" y="1086590"/>
-                  </a:lnTo>
-                  <a:lnTo>
-                    <a:pt x="6302782" y="1092818"/>
-                  </a:lnTo>
-                  <a:lnTo>
-                    <a:pt x="6374404" y="1098958"/>
-                  </a:lnTo>
-                  <a:lnTo>
-                    <a:pt x="6446027" y="1105010"/>
-                  </a:lnTo>
-                  <a:lnTo>
-                    <a:pt x="6517649" y="1110976"/>
-                  </a:lnTo>
-                  <a:lnTo>
-                    <a:pt x="6589272" y="1116857"/>
-                  </a:lnTo>
-                  <a:lnTo>
-                    <a:pt x="6660894" y="1122654"/>
-                  </a:lnTo>
-                  <a:lnTo>
-                    <a:pt x="6732517" y="1128369"/>
-                  </a:lnTo>
-                  <a:lnTo>
-                    <a:pt x="6804139" y="1134002"/>
-                  </a:lnTo>
-                  <a:lnTo>
-                    <a:pt x="6875762" y="1139555"/>
-                  </a:lnTo>
-                  <a:lnTo>
-                    <a:pt x="6947385" y="1145028"/>
-                  </a:lnTo>
-                  <a:lnTo>
-                    <a:pt x="7019007" y="1150424"/>
-                  </a:lnTo>
-                  <a:lnTo>
-                    <a:pt x="7090630" y="1155743"/>
+                    <a:pt x="71622" y="22335"/>
+                  </a:lnTo>
+                  <a:lnTo>
+                    <a:pt x="143245" y="44346"/>
+                  </a:lnTo>
+                  <a:lnTo>
+                    <a:pt x="214867" y="66038"/>
+                  </a:lnTo>
+                  <a:lnTo>
+                    <a:pt x="286490" y="87415"/>
+                  </a:lnTo>
+                  <a:lnTo>
+                    <a:pt x="358112" y="108482"/>
+                  </a:lnTo>
+                  <a:lnTo>
+                    <a:pt x="429735" y="129244"/>
+                  </a:lnTo>
+                  <a:lnTo>
+                    <a:pt x="501357" y="149705"/>
+                  </a:lnTo>
+                  <a:lnTo>
+                    <a:pt x="572980" y="169869"/>
+                  </a:lnTo>
+                  <a:lnTo>
+                    <a:pt x="644602" y="189741"/>
+                  </a:lnTo>
+                  <a:lnTo>
+                    <a:pt x="716225" y="209324"/>
+                  </a:lnTo>
+                  <a:lnTo>
+                    <a:pt x="787847" y="228623"/>
+                  </a:lnTo>
+                  <a:lnTo>
+                    <a:pt x="859470" y="247643"/>
+                  </a:lnTo>
+                  <a:lnTo>
+                    <a:pt x="931092" y="266387"/>
+                  </a:lnTo>
+                  <a:lnTo>
+                    <a:pt x="1002715" y="284858"/>
+                  </a:lnTo>
+                  <a:lnTo>
+                    <a:pt x="1074337" y="303062"/>
+                  </a:lnTo>
+                  <a:lnTo>
+                    <a:pt x="1145960" y="321002"/>
+                  </a:lnTo>
+                  <a:lnTo>
+                    <a:pt x="1217582" y="338682"/>
+                  </a:lnTo>
+                  <a:lnTo>
+                    <a:pt x="1289205" y="356105"/>
+                  </a:lnTo>
+                  <a:lnTo>
+                    <a:pt x="1360827" y="373276"/>
+                  </a:lnTo>
+                  <a:lnTo>
+                    <a:pt x="1432450" y="390198"/>
+                  </a:lnTo>
+                  <a:lnTo>
+                    <a:pt x="1504073" y="406874"/>
+                  </a:lnTo>
+                  <a:lnTo>
+                    <a:pt x="1575695" y="423309"/>
+                  </a:lnTo>
+                  <a:lnTo>
+                    <a:pt x="1647318" y="439505"/>
+                  </a:lnTo>
+                  <a:lnTo>
+                    <a:pt x="1718940" y="455466"/>
+                  </a:lnTo>
+                  <a:lnTo>
+                    <a:pt x="1790563" y="471196"/>
+                  </a:lnTo>
+                  <a:lnTo>
+                    <a:pt x="1862185" y="486697"/>
+                  </a:lnTo>
+                  <a:lnTo>
+                    <a:pt x="1933808" y="501974"/>
+                  </a:lnTo>
+                  <a:lnTo>
+                    <a:pt x="2005430" y="517029"/>
+                  </a:lnTo>
+                  <a:lnTo>
+                    <a:pt x="2077053" y="531866"/>
+                  </a:lnTo>
+                  <a:lnTo>
+                    <a:pt x="2148675" y="546488"/>
+                  </a:lnTo>
+                  <a:lnTo>
+                    <a:pt x="2220298" y="560898"/>
+                  </a:lnTo>
+                  <a:lnTo>
+                    <a:pt x="2291920" y="575098"/>
+                  </a:lnTo>
+                  <a:lnTo>
+                    <a:pt x="2363543" y="589093"/>
+                  </a:lnTo>
+                  <a:lnTo>
+                    <a:pt x="2435165" y="602885"/>
+                  </a:lnTo>
+                  <a:lnTo>
+                    <a:pt x="2506788" y="616477"/>
+                  </a:lnTo>
+                  <a:lnTo>
+                    <a:pt x="2578410" y="629871"/>
+                  </a:lnTo>
+                  <a:lnTo>
+                    <a:pt x="2650033" y="643072"/>
+                  </a:lnTo>
+                  <a:lnTo>
+                    <a:pt x="2721655" y="656081"/>
+                  </a:lnTo>
+                  <a:lnTo>
+                    <a:pt x="2793278" y="668901"/>
+                  </a:lnTo>
+                  <a:lnTo>
+                    <a:pt x="2864901" y="681535"/>
+                  </a:lnTo>
+                  <a:lnTo>
+                    <a:pt x="2936523" y="693987"/>
+                  </a:lnTo>
+                  <a:lnTo>
+                    <a:pt x="3008146" y="706257"/>
+                  </a:lnTo>
+                  <a:lnTo>
+                    <a:pt x="3079768" y="718350"/>
+                  </a:lnTo>
+                  <a:lnTo>
+                    <a:pt x="3151391" y="730267"/>
+                  </a:lnTo>
+                  <a:lnTo>
+                    <a:pt x="3223013" y="742012"/>
+                  </a:lnTo>
+                  <a:lnTo>
+                    <a:pt x="3294636" y="753586"/>
+                  </a:lnTo>
+                  <a:lnTo>
+                    <a:pt x="3366258" y="764992"/>
+                  </a:lnTo>
+                  <a:lnTo>
+                    <a:pt x="3437881" y="776233"/>
+                  </a:lnTo>
+                  <a:lnTo>
+                    <a:pt x="3509503" y="787311"/>
+                  </a:lnTo>
+                  <a:lnTo>
+                    <a:pt x="3581126" y="798228"/>
+                  </a:lnTo>
+                  <a:lnTo>
+                    <a:pt x="3652748" y="808987"/>
+                  </a:lnTo>
+                  <a:lnTo>
+                    <a:pt x="3724371" y="819590"/>
+                  </a:lnTo>
+                  <a:lnTo>
+                    <a:pt x="3795993" y="830039"/>
+                  </a:lnTo>
+                  <a:lnTo>
+                    <a:pt x="3867616" y="840336"/>
+                  </a:lnTo>
+                  <a:lnTo>
+                    <a:pt x="3939238" y="850484"/>
+                  </a:lnTo>
+                  <a:lnTo>
+                    <a:pt x="4010861" y="860485"/>
+                  </a:lnTo>
+                  <a:lnTo>
+                    <a:pt x="4082483" y="870341"/>
+                  </a:lnTo>
+                  <a:lnTo>
+                    <a:pt x="4154106" y="880054"/>
+                  </a:lnTo>
+                  <a:lnTo>
+                    <a:pt x="4225729" y="889626"/>
+                  </a:lnTo>
+                  <a:lnTo>
+                    <a:pt x="4297351" y="899060"/>
+                  </a:lnTo>
+                  <a:lnTo>
+                    <a:pt x="4368974" y="908356"/>
+                  </a:lnTo>
+                  <a:lnTo>
+                    <a:pt x="4440596" y="917518"/>
+                  </a:lnTo>
+                  <a:lnTo>
+                    <a:pt x="4512219" y="926547"/>
+                  </a:lnTo>
+                  <a:lnTo>
+                    <a:pt x="4583841" y="935445"/>
+                  </a:lnTo>
+                  <a:lnTo>
+                    <a:pt x="4655464" y="944214"/>
+                  </a:lnTo>
+                  <a:lnTo>
+                    <a:pt x="4727086" y="952855"/>
+                  </a:lnTo>
+                  <a:lnTo>
+                    <a:pt x="4798709" y="961372"/>
+                  </a:lnTo>
+                  <a:lnTo>
+                    <a:pt x="4870331" y="969765"/>
+                  </a:lnTo>
+                  <a:lnTo>
+                    <a:pt x="4941954" y="978036"/>
+                  </a:lnTo>
+                  <a:lnTo>
+                    <a:pt x="5013576" y="986187"/>
+                  </a:lnTo>
+                  <a:lnTo>
+                    <a:pt x="5085199" y="994220"/>
+                  </a:lnTo>
+                  <a:lnTo>
+                    <a:pt x="5156821" y="1002137"/>
+                  </a:lnTo>
+                  <a:lnTo>
+                    <a:pt x="5228444" y="1009938"/>
+                  </a:lnTo>
+                  <a:lnTo>
+                    <a:pt x="5300066" y="1017627"/>
+                  </a:lnTo>
+                  <a:lnTo>
+                    <a:pt x="5371689" y="1025204"/>
+                  </a:lnTo>
+                  <a:lnTo>
+                    <a:pt x="5443311" y="1032671"/>
+                  </a:lnTo>
+                  <a:lnTo>
+                    <a:pt x="5514934" y="1040030"/>
+                  </a:lnTo>
+                  <a:lnTo>
+                    <a:pt x="5586557" y="1047282"/>
+                  </a:lnTo>
+                  <a:lnTo>
+                    <a:pt x="5658179" y="1054429"/>
+                  </a:lnTo>
+                  <a:lnTo>
+                    <a:pt x="5729802" y="1061472"/>
+                  </a:lnTo>
+                  <a:lnTo>
+                    <a:pt x="5801424" y="1068413"/>
+                  </a:lnTo>
+                  <a:lnTo>
+                    <a:pt x="5873047" y="1075254"/>
+                  </a:lnTo>
+                  <a:lnTo>
+                    <a:pt x="5944669" y="1081995"/>
+                  </a:lnTo>
+                  <a:lnTo>
+                    <a:pt x="6016292" y="1088639"/>
+                  </a:lnTo>
+                  <a:lnTo>
+                    <a:pt x="6087914" y="1095186"/>
+                  </a:lnTo>
+                  <a:lnTo>
+                    <a:pt x="6159537" y="1101638"/>
+                  </a:lnTo>
+                  <a:lnTo>
+                    <a:pt x="6231159" y="1107997"/>
+                  </a:lnTo>
+                  <a:lnTo>
+                    <a:pt x="6302782" y="1114263"/>
+                  </a:lnTo>
+                  <a:lnTo>
+                    <a:pt x="6374404" y="1120439"/>
+                  </a:lnTo>
+                  <a:lnTo>
+                    <a:pt x="6446027" y="1126525"/>
+                  </a:lnTo>
+                  <a:lnTo>
+                    <a:pt x="6517649" y="1132523"/>
+                  </a:lnTo>
+                  <a:lnTo>
+                    <a:pt x="6589272" y="1138433"/>
+                  </a:lnTo>
+                  <a:lnTo>
+                    <a:pt x="6660894" y="1144258"/>
+                  </a:lnTo>
+                  <a:lnTo>
+                    <a:pt x="6732517" y="1149999"/>
+                  </a:lnTo>
+                  <a:lnTo>
+                    <a:pt x="6804139" y="1155656"/>
+                  </a:lnTo>
+                  <a:lnTo>
+                    <a:pt x="6875762" y="1161232"/>
+                  </a:lnTo>
+                  <a:lnTo>
+                    <a:pt x="6947385" y="1166726"/>
+                  </a:lnTo>
+                  <a:lnTo>
+                    <a:pt x="7019007" y="1172141"/>
+                  </a:lnTo>
+                  <a:lnTo>
+                    <a:pt x="7090630" y="1177477"/>
                   </a:lnTo>
                 </a:path>
               </a:pathLst>
@@ -5371,7 +5371,7 @@
                   <a:latin typeface="Helvetica"/>
                   <a:cs typeface="Helvetica"/>
                 </a:rPr>
-                <a:t>subHR per 10 % decline: 1.19 (1.08-1.32), p_Bonf = 0.004 (n = 6)  |  per IQR decline (Δ = 27.5 %): 1.62 (1.22-2.14)  |  IQR: [-29.1, -1.6] %</a:t>
+                <a:t>subHR per 10 % decline: 1.20 (1.08-1.32), p_Bonf = 0.003 (n = 6)  |  per IQR decline (Δ = 27.5 %): 1.63 (1.24-2.16)  |  IQR: [-29.1, -1.6] %</a:t>
               </a:r>
             </a:p>
           </p:txBody>
